--- a/ppt/13.C언어-함수포인터.pptx
+++ b/ppt/13.C언어-함수포인터.pptx
@@ -9954,7 +9954,7 @@
           <a:lstStyle/>
           <a:p>
             <a:r>
-              <a:rPr lang="en-US" altLang="ko-KR" sz="1600" b="0" i="0" u="none" strike="noStrike" dirty="0">
+              <a:rPr lang="en-US" altLang="ko-KR" sz="1600" b="1" i="0" u="none" strike="noStrike" dirty="0">
                 <a:solidFill>
                   <a:srgbClr val="4078F2"/>
                 </a:solidFill>
@@ -9964,7 +9964,7 @@
               <a:t>#include </a:t>
             </a:r>
             <a:r>
-              <a:rPr lang="en-US" altLang="ko-KR" sz="1600" b="0" i="0" u="none" strike="noStrike" dirty="0">
+              <a:rPr lang="en-US" altLang="ko-KR" sz="1600" b="1" i="0" u="none" strike="noStrike" dirty="0">
                 <a:solidFill>
                   <a:srgbClr val="50A14F"/>
                 </a:solidFill>
@@ -9974,7 +9974,7 @@
               <a:t>&lt;stdio.h&gt;</a:t>
             </a:r>
             <a:br>
-              <a:rPr lang="en-US" altLang="ko-KR" sz="1600" b="0" i="0" u="none" strike="noStrike" dirty="0">
+              <a:rPr lang="en-US" altLang="ko-KR" sz="1600" b="1" i="0" u="none" strike="noStrike" dirty="0">
                 <a:solidFill>
                   <a:srgbClr val="383A42"/>
                 </a:solidFill>
@@ -9983,7 +9983,7 @@
               </a:rPr>
             </a:br>
             <a:br>
-              <a:rPr lang="en-US" altLang="ko-KR" sz="1600" b="0" i="0" u="none" strike="noStrike" dirty="0">
+              <a:rPr lang="en-US" altLang="ko-KR" sz="1600" b="1" i="0" u="none" strike="noStrike" dirty="0">
                 <a:solidFill>
                   <a:srgbClr val="383A42"/>
                 </a:solidFill>
@@ -9992,7 +9992,7 @@
               </a:rPr>
             </a:br>
             <a:r>
-              <a:rPr lang="en-US" altLang="ko-KR" sz="1600" b="0" i="0" u="none" strike="noStrike" dirty="0">
+              <a:rPr lang="en-US" altLang="ko-KR" sz="1600" b="1" i="0" u="none" strike="noStrike" dirty="0">
                 <a:solidFill>
                   <a:srgbClr val="A626A4"/>
                 </a:solidFill>
@@ -10002,7 +10002,7 @@
               <a:t>typedef</a:t>
             </a:r>
             <a:r>
-              <a:rPr lang="en-US" altLang="ko-KR" sz="1600" b="0" i="0" u="none" strike="noStrike" dirty="0">
+              <a:rPr lang="en-US" altLang="ko-KR" sz="1600" b="1" i="0" u="none" strike="noStrike" dirty="0">
                 <a:solidFill>
                   <a:srgbClr val="383A42"/>
                 </a:solidFill>
@@ -10012,7 +10012,7 @@
               <a:t> </a:t>
             </a:r>
             <a:r>
-              <a:rPr lang="en-US" altLang="ko-KR" sz="1600" b="0" i="0" u="none" strike="noStrike" dirty="0">
+              <a:rPr lang="en-US" altLang="ko-KR" sz="1600" b="1" i="0" u="none" strike="noStrike" dirty="0">
                 <a:solidFill>
                   <a:srgbClr val="4078F2"/>
                 </a:solidFill>
@@ -10022,7 +10022,7 @@
               <a:t>void</a:t>
             </a:r>
             <a:r>
-              <a:rPr lang="en-US" altLang="ko-KR" sz="1600" b="0" i="0" u="none" strike="noStrike" dirty="0">
+              <a:rPr lang="en-US" altLang="ko-KR" sz="1600" b="1" i="0" u="none" strike="noStrike" dirty="0">
                 <a:solidFill>
                   <a:srgbClr val="383A42"/>
                 </a:solidFill>
@@ -10032,7 +10032,7 @@
               <a:t> (*Callback)(</a:t>
             </a:r>
             <a:r>
-              <a:rPr lang="en-US" altLang="ko-KR" sz="1600" b="0" i="0" u="none" strike="noStrike" dirty="0">
+              <a:rPr lang="en-US" altLang="ko-KR" sz="1600" b="1" i="0" u="none" strike="noStrike" dirty="0">
                 <a:solidFill>
                   <a:srgbClr val="A626A4"/>
                 </a:solidFill>
@@ -10042,7 +10042,7 @@
               <a:t>void</a:t>
             </a:r>
             <a:r>
-              <a:rPr lang="en-US" altLang="ko-KR" sz="1600" b="0" i="0" u="none" strike="noStrike" dirty="0">
+              <a:rPr lang="en-US" altLang="ko-KR" sz="1600" b="1" i="0" u="none" strike="noStrike" dirty="0">
                 <a:solidFill>
                   <a:srgbClr val="383A42"/>
                 </a:solidFill>
@@ -10052,7 +10052,7 @@
               <a:t>*);</a:t>
             </a:r>
             <a:br>
-              <a:rPr lang="en-US" altLang="ko-KR" sz="1600" b="0" i="0" u="none" strike="noStrike" dirty="0">
+              <a:rPr lang="en-US" altLang="ko-KR" sz="1600" b="1" i="0" u="none" strike="noStrike" dirty="0">
                 <a:solidFill>
                   <a:srgbClr val="383A42"/>
                 </a:solidFill>
@@ -10061,7 +10061,7 @@
               </a:rPr>
             </a:br>
             <a:br>
-              <a:rPr lang="en-US" altLang="ko-KR" sz="1600" b="0" i="0" u="none" strike="noStrike" dirty="0">
+              <a:rPr lang="en-US" altLang="ko-KR" sz="1600" b="1" i="0" u="none" strike="noStrike" dirty="0">
                 <a:solidFill>
                   <a:srgbClr val="383A42"/>
                 </a:solidFill>
@@ -10070,7 +10070,7 @@
               </a:rPr>
             </a:br>
             <a:r>
-              <a:rPr lang="en-US" altLang="ko-KR" sz="1600" b="0" i="0" u="none" strike="noStrike" dirty="0">
+              <a:rPr lang="en-US" altLang="ko-KR" sz="1600" b="1" i="0" u="none" strike="noStrike" dirty="0">
                 <a:solidFill>
                   <a:srgbClr val="A626A4"/>
                 </a:solidFill>
@@ -10080,7 +10080,7 @@
               <a:t>void</a:t>
             </a:r>
             <a:r>
-              <a:rPr lang="en-US" altLang="ko-KR" sz="1600" b="0" i="0" u="none" strike="noStrike" dirty="0">
+              <a:rPr lang="en-US" altLang="ko-KR" sz="1600" b="1" i="0" u="none" strike="noStrike" dirty="0">
                 <a:solidFill>
                   <a:srgbClr val="383A42"/>
                 </a:solidFill>
@@ -10090,7 +10090,7 @@
               <a:t> </a:t>
             </a:r>
             <a:r>
-              <a:rPr lang="en-US" altLang="ko-KR" sz="1600" b="0" i="0" u="none" strike="noStrike" dirty="0">
+              <a:rPr lang="en-US" altLang="ko-KR" sz="1600" b="1" i="0" u="none" strike="noStrike" dirty="0">
                 <a:solidFill>
                   <a:srgbClr val="4078F2"/>
                 </a:solidFill>
@@ -10100,7 +10100,7 @@
               <a:t>InvokeThreeTimes</a:t>
             </a:r>
             <a:r>
-              <a:rPr lang="en-US" altLang="ko-KR" sz="1600" b="0" i="0" u="none" strike="noStrike" dirty="0">
+              <a:rPr lang="en-US" altLang="ko-KR" sz="1600" b="1" i="0" u="none" strike="noStrike" dirty="0">
                 <a:solidFill>
                   <a:srgbClr val="383A42"/>
                 </a:solidFill>
@@ -10110,7 +10110,7 @@
               <a:t>(Callback cb, </a:t>
             </a:r>
             <a:r>
-              <a:rPr lang="en-US" altLang="ko-KR" sz="1600" b="0" i="0" u="none" strike="noStrike" dirty="0">
+              <a:rPr lang="en-US" altLang="ko-KR" sz="1600" b="1" i="0" u="none" strike="noStrike" dirty="0">
                 <a:solidFill>
                   <a:srgbClr val="A626A4"/>
                 </a:solidFill>
@@ -10120,7 +10120,7 @@
               <a:t>void</a:t>
             </a:r>
             <a:r>
-              <a:rPr lang="en-US" altLang="ko-KR" sz="1600" b="0" i="0" u="none" strike="noStrike" dirty="0">
+              <a:rPr lang="en-US" altLang="ko-KR" sz="1600" b="1" i="0" u="none" strike="noStrike" dirty="0">
                 <a:solidFill>
                   <a:srgbClr val="383A42"/>
                 </a:solidFill>
@@ -10130,7 +10130,7 @@
               <a:t>* userData)</a:t>
             </a:r>
             <a:br>
-              <a:rPr lang="en-US" altLang="ko-KR" sz="1600" b="0" i="0" u="none" strike="noStrike" dirty="0">
+              <a:rPr lang="en-US" altLang="ko-KR" sz="1600" b="1" i="0" u="none" strike="noStrike" dirty="0">
                 <a:solidFill>
                   <a:srgbClr val="383A42"/>
                 </a:solidFill>
@@ -10139,7 +10139,7 @@
               </a:rPr>
             </a:br>
             <a:r>
-              <a:rPr lang="en-US" altLang="ko-KR" sz="1600" b="0" i="0" u="none" strike="noStrike" dirty="0">
+              <a:rPr lang="en-US" altLang="ko-KR" sz="1600" b="1" i="0" u="none" strike="noStrike" dirty="0">
                 <a:solidFill>
                   <a:srgbClr val="383A42"/>
                 </a:solidFill>
@@ -10149,7 +10149,7 @@
               <a:t>{</a:t>
             </a:r>
             <a:br>
-              <a:rPr lang="en-US" altLang="ko-KR" sz="1600" b="0" i="0" u="none" strike="noStrike" dirty="0">
+              <a:rPr lang="en-US" altLang="ko-KR" sz="1600" b="1" i="0" u="none" strike="noStrike" dirty="0">
                 <a:solidFill>
                   <a:srgbClr val="383A42"/>
                 </a:solidFill>
@@ -10158,7 +10158,7 @@
               </a:rPr>
             </a:br>
             <a:r>
-              <a:rPr lang="en-US" altLang="ko-KR" sz="1600" b="0" i="0" u="none" strike="noStrike" dirty="0">
+              <a:rPr lang="en-US" altLang="ko-KR" sz="1600" b="1" i="0" u="none" strike="noStrike" dirty="0">
                 <a:solidFill>
                   <a:srgbClr val="383A42"/>
                 </a:solidFill>
@@ -10168,7 +10168,7 @@
               <a:t>    </a:t>
             </a:r>
             <a:r>
-              <a:rPr lang="en-US" altLang="ko-KR" sz="1600" b="0" i="0" u="none" strike="noStrike" dirty="0">
+              <a:rPr lang="en-US" altLang="ko-KR" sz="1600" b="1" i="0" u="none" strike="noStrike" dirty="0">
                 <a:solidFill>
                   <a:srgbClr val="A626A4"/>
                 </a:solidFill>
@@ -10178,7 +10178,7 @@
               <a:t>for</a:t>
             </a:r>
             <a:r>
-              <a:rPr lang="en-US" altLang="ko-KR" sz="1600" b="0" i="0" u="none" strike="noStrike" dirty="0">
+              <a:rPr lang="en-US" altLang="ko-KR" sz="1600" b="1" i="0" u="none" strike="noStrike" dirty="0">
                 <a:solidFill>
                   <a:srgbClr val="383A42"/>
                 </a:solidFill>
@@ -10188,7 +10188,7 @@
               <a:t> (</a:t>
             </a:r>
             <a:r>
-              <a:rPr lang="en-US" altLang="ko-KR" sz="1600" b="0" i="0" u="none" strike="noStrike" dirty="0">
+              <a:rPr lang="en-US" altLang="ko-KR" sz="1600" b="1" i="0" u="none" strike="noStrike" dirty="0">
                 <a:solidFill>
                   <a:srgbClr val="A626A4"/>
                 </a:solidFill>
@@ -10198,7 +10198,7 @@
               <a:t>int</a:t>
             </a:r>
             <a:r>
-              <a:rPr lang="en-US" altLang="ko-KR" sz="1600" b="0" i="0" u="none" strike="noStrike" dirty="0">
+              <a:rPr lang="en-US" altLang="ko-KR" sz="1600" b="1" i="0" u="none" strike="noStrike" dirty="0">
                 <a:solidFill>
                   <a:srgbClr val="383A42"/>
                 </a:solidFill>
@@ -10208,7 +10208,7 @@
               <a:t> i = </a:t>
             </a:r>
             <a:r>
-              <a:rPr lang="en-US" altLang="ko-KR" sz="1600" b="0" i="0" u="none" strike="noStrike" dirty="0">
+              <a:rPr lang="en-US" altLang="ko-KR" sz="1600" b="1" i="0" u="none" strike="noStrike" dirty="0">
                 <a:solidFill>
                   <a:srgbClr val="986801"/>
                 </a:solidFill>
@@ -10218,7 +10218,7 @@
               <a:t>0</a:t>
             </a:r>
             <a:r>
-              <a:rPr lang="en-US" altLang="ko-KR" sz="1600" b="0" i="0" u="none" strike="noStrike" dirty="0">
+              <a:rPr lang="en-US" altLang="ko-KR" sz="1600" b="1" i="0" u="none" strike="noStrike" dirty="0">
                 <a:solidFill>
                   <a:srgbClr val="383A42"/>
                 </a:solidFill>
@@ -10228,7 +10228,7 @@
               <a:t>; i &lt; </a:t>
             </a:r>
             <a:r>
-              <a:rPr lang="en-US" altLang="ko-KR" sz="1600" b="0" i="0" u="none" strike="noStrike" dirty="0">
+              <a:rPr lang="en-US" altLang="ko-KR" sz="1600" b="1" i="0" u="none" strike="noStrike" dirty="0">
                 <a:solidFill>
                   <a:srgbClr val="986801"/>
                 </a:solidFill>
@@ -10238,7 +10238,7 @@
               <a:t>3</a:t>
             </a:r>
             <a:r>
-              <a:rPr lang="en-US" altLang="ko-KR" sz="1600" b="0" i="0" u="none" strike="noStrike" dirty="0">
+              <a:rPr lang="en-US" altLang="ko-KR" sz="1600" b="1" i="0" u="none" strike="noStrike" dirty="0">
                 <a:solidFill>
                   <a:srgbClr val="383A42"/>
                 </a:solidFill>
@@ -10248,7 +10248,7 @@
               <a:t>; ++i)</a:t>
             </a:r>
             <a:br>
-              <a:rPr lang="en-US" altLang="ko-KR" sz="1600" b="0" i="0" u="none" strike="noStrike" dirty="0">
+              <a:rPr lang="en-US" altLang="ko-KR" sz="1600" b="1" i="0" u="none" strike="noStrike" dirty="0">
                 <a:solidFill>
                   <a:srgbClr val="383A42"/>
                 </a:solidFill>
@@ -10257,7 +10257,7 @@
               </a:rPr>
             </a:br>
             <a:r>
-              <a:rPr lang="en-US" altLang="ko-KR" sz="1600" b="0" i="0" u="none" strike="noStrike" dirty="0">
+              <a:rPr lang="en-US" altLang="ko-KR" sz="1600" b="1" i="0" u="none" strike="noStrike" dirty="0">
                 <a:solidFill>
                   <a:srgbClr val="383A42"/>
                 </a:solidFill>
@@ -10267,7 +10267,7 @@
               <a:t>        cb(userData);   </a:t>
             </a:r>
             <a:r>
-              <a:rPr lang="en-US" altLang="ko-KR" sz="1600" b="0" i="1" u="none" strike="noStrike" dirty="0">
+              <a:rPr lang="en-US" altLang="ko-KR" sz="1600" b="1" i="1" u="none" strike="noStrike" dirty="0">
                 <a:solidFill>
                   <a:srgbClr val="A0A1A7"/>
                 </a:solidFill>
@@ -10277,7 +10277,7 @@
               <a:t>// </a:t>
             </a:r>
             <a:r>
-              <a:rPr lang="ko-KR" altLang="en-US" sz="1600" b="0" i="1" u="none" strike="noStrike" dirty="0">
+              <a:rPr lang="ko-KR" altLang="en-US" sz="1600" b="1" i="1" u="none" strike="noStrike" dirty="0">
                 <a:solidFill>
                   <a:srgbClr val="A0A1A7"/>
                 </a:solidFill>
@@ -10287,7 +10287,7 @@
               <a:t>매번 같은 </a:t>
             </a:r>
             <a:r>
-              <a:rPr lang="en-US" altLang="ko-KR" sz="1600" b="0" i="1" u="none" strike="noStrike" dirty="0">
+              <a:rPr lang="en-US" altLang="ko-KR" sz="1600" b="1" i="1" u="none" strike="noStrike" dirty="0">
                 <a:solidFill>
                   <a:srgbClr val="A0A1A7"/>
                 </a:solidFill>
@@ -10297,7 +10297,7 @@
               <a:t>userData </a:t>
             </a:r>
             <a:r>
-              <a:rPr lang="ko-KR" altLang="en-US" sz="1600" b="0" i="1" u="none" strike="noStrike" dirty="0">
+              <a:rPr lang="ko-KR" altLang="en-US" sz="1600" b="1" i="1" u="none" strike="noStrike" dirty="0">
                 <a:solidFill>
                   <a:srgbClr val="A0A1A7"/>
                 </a:solidFill>
@@ -10307,7 +10307,7 @@
               <a:t>전달</a:t>
             </a:r>
             <a:br>
-              <a:rPr lang="ko-KR" altLang="en-US" sz="1600" b="0" i="0" u="none" strike="noStrike" dirty="0">
+              <a:rPr lang="ko-KR" altLang="en-US" sz="1600" b="1" i="0" u="none" strike="noStrike" dirty="0">
                 <a:solidFill>
                   <a:srgbClr val="383A42"/>
                 </a:solidFill>
@@ -10316,7 +10316,7 @@
               </a:rPr>
             </a:br>
             <a:r>
-              <a:rPr lang="en-US" altLang="ko-KR" sz="1600" b="0" i="0" u="none" strike="noStrike" dirty="0">
+              <a:rPr lang="en-US" altLang="ko-KR" sz="1600" b="1" i="0" u="none" strike="noStrike" dirty="0">
                 <a:solidFill>
                   <a:srgbClr val="383A42"/>
                 </a:solidFill>
@@ -10326,7 +10326,7 @@
               <a:t>}</a:t>
             </a:r>
             <a:br>
-              <a:rPr lang="en-US" altLang="ko-KR" sz="1600" b="0" i="0" u="none" strike="noStrike" dirty="0">
+              <a:rPr lang="en-US" altLang="ko-KR" sz="1600" b="1" i="0" u="none" strike="noStrike" dirty="0">
                 <a:solidFill>
                   <a:srgbClr val="383A42"/>
                 </a:solidFill>
@@ -10335,7 +10335,7 @@
               </a:rPr>
             </a:br>
             <a:br>
-              <a:rPr lang="en-US" altLang="ko-KR" sz="1600" b="0" i="0" u="none" strike="noStrike" dirty="0">
+              <a:rPr lang="en-US" altLang="ko-KR" sz="1600" b="1" i="0" u="none" strike="noStrike" dirty="0">
                 <a:solidFill>
                   <a:srgbClr val="383A42"/>
                 </a:solidFill>
@@ -10344,7 +10344,7 @@
               </a:rPr>
             </a:br>
             <a:r>
-              <a:rPr lang="en-US" altLang="ko-KR" sz="1600" b="0" i="0" u="none" strike="noStrike" dirty="0">
+              <a:rPr lang="en-US" altLang="ko-KR" sz="1600" b="1" i="0" u="none" strike="noStrike" dirty="0">
                 <a:solidFill>
                   <a:srgbClr val="A626A4"/>
                 </a:solidFill>
@@ -10354,7 +10354,7 @@
               <a:t>void</a:t>
             </a:r>
             <a:r>
-              <a:rPr lang="en-US" altLang="ko-KR" sz="1600" b="0" i="0" u="none" strike="noStrike" dirty="0">
+              <a:rPr lang="en-US" altLang="ko-KR" sz="1600" b="1" i="0" u="none" strike="noStrike" dirty="0">
                 <a:solidFill>
                   <a:srgbClr val="383A42"/>
                 </a:solidFill>
@@ -10364,7 +10364,7 @@
               <a:t> </a:t>
             </a:r>
             <a:r>
-              <a:rPr lang="en-US" altLang="ko-KR" sz="1600" b="0" i="0" u="none" strike="noStrike" dirty="0">
+              <a:rPr lang="en-US" altLang="ko-KR" sz="1600" b="1" i="0" u="none" strike="noStrike" dirty="0">
                 <a:solidFill>
                   <a:srgbClr val="4078F2"/>
                 </a:solidFill>
@@ -10374,7 +10374,7 @@
               <a:t>PrintMessage</a:t>
             </a:r>
             <a:r>
-              <a:rPr lang="en-US" altLang="ko-KR" sz="1600" b="0" i="0" u="none" strike="noStrike" dirty="0">
+              <a:rPr lang="en-US" altLang="ko-KR" sz="1600" b="1" i="0" u="none" strike="noStrike" dirty="0">
                 <a:solidFill>
                   <a:srgbClr val="383A42"/>
                 </a:solidFill>
@@ -10384,7 +10384,7 @@
               <a:t>(</a:t>
             </a:r>
             <a:r>
-              <a:rPr lang="en-US" altLang="ko-KR" sz="1600" b="0" i="0" u="none" strike="noStrike" dirty="0">
+              <a:rPr lang="en-US" altLang="ko-KR" sz="1600" b="1" i="0" u="none" strike="noStrike" dirty="0">
                 <a:solidFill>
                   <a:srgbClr val="A626A4"/>
                 </a:solidFill>
@@ -10394,7 +10394,7 @@
               <a:t>void</a:t>
             </a:r>
             <a:r>
-              <a:rPr lang="en-US" altLang="ko-KR" sz="1600" b="0" i="0" u="none" strike="noStrike" dirty="0">
+              <a:rPr lang="en-US" altLang="ko-KR" sz="1600" b="1" i="0" u="none" strike="noStrike" dirty="0">
                 <a:solidFill>
                   <a:srgbClr val="383A42"/>
                 </a:solidFill>
@@ -10404,7 +10404,7 @@
               <a:t>* userData)</a:t>
             </a:r>
             <a:br>
-              <a:rPr lang="en-US" altLang="ko-KR" sz="1600" b="0" i="0" u="none" strike="noStrike" dirty="0">
+              <a:rPr lang="en-US" altLang="ko-KR" sz="1600" b="1" i="0" u="none" strike="noStrike" dirty="0">
                 <a:solidFill>
                   <a:srgbClr val="383A42"/>
                 </a:solidFill>
@@ -10413,7 +10413,7 @@
               </a:rPr>
             </a:br>
             <a:r>
-              <a:rPr lang="en-US" altLang="ko-KR" sz="1600" b="0" i="0" u="none" strike="noStrike" dirty="0">
+              <a:rPr lang="en-US" altLang="ko-KR" sz="1600" b="1" i="0" u="none" strike="noStrike" dirty="0">
                 <a:solidFill>
                   <a:srgbClr val="383A42"/>
                 </a:solidFill>
@@ -10423,7 +10423,7 @@
               <a:t>{</a:t>
             </a:r>
             <a:br>
-              <a:rPr lang="en-US" altLang="ko-KR" sz="1600" b="0" i="0" u="none" strike="noStrike" dirty="0">
+              <a:rPr lang="en-US" altLang="ko-KR" sz="1600" b="1" i="0" u="none" strike="noStrike" dirty="0">
                 <a:solidFill>
                   <a:srgbClr val="383A42"/>
                 </a:solidFill>
@@ -10432,7 +10432,7 @@
               </a:rPr>
             </a:br>
             <a:r>
-              <a:rPr lang="en-US" altLang="ko-KR" sz="1600" b="0" i="0" u="none" strike="noStrike" dirty="0">
+              <a:rPr lang="en-US" altLang="ko-KR" sz="1600" b="1" i="0" u="none" strike="noStrike" dirty="0">
                 <a:solidFill>
                   <a:srgbClr val="383A42"/>
                 </a:solidFill>
@@ -10442,7 +10442,7 @@
               <a:t>    </a:t>
             </a:r>
             <a:r>
-              <a:rPr lang="en-US" altLang="ko-KR" sz="1600" b="0" i="0" u="none" strike="noStrike" dirty="0">
+              <a:rPr lang="en-US" altLang="ko-KR" sz="1600" b="1" i="0" u="none" strike="noStrike" dirty="0">
                 <a:solidFill>
                   <a:srgbClr val="A626A4"/>
                 </a:solidFill>
@@ -10452,7 +10452,7 @@
               <a:t>const</a:t>
             </a:r>
             <a:r>
-              <a:rPr lang="en-US" altLang="ko-KR" sz="1600" b="0" i="0" u="none" strike="noStrike" dirty="0">
+              <a:rPr lang="en-US" altLang="ko-KR" sz="1600" b="1" i="0" u="none" strike="noStrike" dirty="0">
                 <a:solidFill>
                   <a:srgbClr val="383A42"/>
                 </a:solidFill>
@@ -10462,7 +10462,7 @@
               <a:t> </a:t>
             </a:r>
             <a:r>
-              <a:rPr lang="en-US" altLang="ko-KR" sz="1600" b="0" i="0" u="none" strike="noStrike" dirty="0">
+              <a:rPr lang="en-US" altLang="ko-KR" sz="1600" b="1" i="0" u="none" strike="noStrike" dirty="0">
                 <a:solidFill>
                   <a:srgbClr val="A626A4"/>
                 </a:solidFill>
@@ -10472,7 +10472,7 @@
               <a:t>char</a:t>
             </a:r>
             <a:r>
-              <a:rPr lang="en-US" altLang="ko-KR" sz="1600" b="0" i="0" u="none" strike="noStrike" dirty="0">
+              <a:rPr lang="en-US" altLang="ko-KR" sz="1600" b="1" i="0" u="none" strike="noStrike" dirty="0">
                 <a:solidFill>
                   <a:srgbClr val="383A42"/>
                 </a:solidFill>
@@ -10482,7 +10482,7 @@
               <a:t>* msg = (</a:t>
             </a:r>
             <a:r>
-              <a:rPr lang="en-US" altLang="ko-KR" sz="1600" b="0" i="0" u="none" strike="noStrike" dirty="0">
+              <a:rPr lang="en-US" altLang="ko-KR" sz="1600" b="1" i="0" u="none" strike="noStrike" dirty="0">
                 <a:solidFill>
                   <a:srgbClr val="A626A4"/>
                 </a:solidFill>
@@ -10492,7 +10492,7 @@
               <a:t>const</a:t>
             </a:r>
             <a:r>
-              <a:rPr lang="en-US" altLang="ko-KR" sz="1600" b="0" i="0" u="none" strike="noStrike" dirty="0">
+              <a:rPr lang="en-US" altLang="ko-KR" sz="1600" b="1" i="0" u="none" strike="noStrike" dirty="0">
                 <a:solidFill>
                   <a:srgbClr val="383A42"/>
                 </a:solidFill>
@@ -10502,7 +10502,7 @@
               <a:t> </a:t>
             </a:r>
             <a:r>
-              <a:rPr lang="en-US" altLang="ko-KR" sz="1600" b="0" i="0" u="none" strike="noStrike" dirty="0">
+              <a:rPr lang="en-US" altLang="ko-KR" sz="1600" b="1" i="0" u="none" strike="noStrike" dirty="0">
                 <a:solidFill>
                   <a:srgbClr val="A626A4"/>
                 </a:solidFill>
@@ -10512,7 +10512,7 @@
               <a:t>char</a:t>
             </a:r>
             <a:r>
-              <a:rPr lang="en-US" altLang="ko-KR" sz="1600" b="0" i="0" u="none" strike="noStrike" dirty="0">
+              <a:rPr lang="en-US" altLang="ko-KR" sz="1600" b="1" i="0" u="none" strike="noStrike" dirty="0">
                 <a:solidFill>
                   <a:srgbClr val="383A42"/>
                 </a:solidFill>
@@ -10522,7 +10522,7 @@
               <a:t>*)userData;</a:t>
             </a:r>
             <a:br>
-              <a:rPr lang="en-US" altLang="ko-KR" sz="1600" b="0" i="0" u="none" strike="noStrike" dirty="0">
+              <a:rPr lang="en-US" altLang="ko-KR" sz="1600" b="1" i="0" u="none" strike="noStrike" dirty="0">
                 <a:solidFill>
                   <a:srgbClr val="383A42"/>
                 </a:solidFill>
@@ -10531,7 +10531,7 @@
               </a:rPr>
             </a:br>
             <a:r>
-              <a:rPr lang="en-US" altLang="ko-KR" sz="1600" b="0" i="0" u="none" strike="noStrike" dirty="0">
+              <a:rPr lang="en-US" altLang="ko-KR" sz="1600" b="1" i="0" u="none" strike="noStrike" dirty="0">
                 <a:solidFill>
                   <a:srgbClr val="383A42"/>
                 </a:solidFill>
@@ -10541,7 +10541,7 @@
               <a:t>    </a:t>
             </a:r>
             <a:r>
-              <a:rPr lang="en-US" altLang="ko-KR" sz="1600" b="0" i="0" u="none" strike="noStrike" dirty="0">
+              <a:rPr lang="en-US" altLang="ko-KR" sz="1600" b="1" i="0" u="none" strike="noStrike" dirty="0">
                 <a:solidFill>
                   <a:srgbClr val="C18401"/>
                 </a:solidFill>
@@ -10551,7 +10551,7 @@
               <a:t>printf</a:t>
             </a:r>
             <a:r>
-              <a:rPr lang="en-US" altLang="ko-KR" sz="1600" b="0" i="0" u="none" strike="noStrike" dirty="0">
+              <a:rPr lang="en-US" altLang="ko-KR" sz="1600" b="1" i="0" u="none" strike="noStrike" dirty="0">
                 <a:solidFill>
                   <a:srgbClr val="383A42"/>
                 </a:solidFill>
@@ -10561,7 +10561,7 @@
               <a:t>(</a:t>
             </a:r>
             <a:r>
-              <a:rPr lang="en-US" altLang="ko-KR" sz="1600" b="0" i="0" u="none" strike="noStrike" dirty="0">
+              <a:rPr lang="en-US" altLang="ko-KR" sz="1600" b="1" i="0" u="none" strike="noStrike" dirty="0">
                 <a:solidFill>
                   <a:srgbClr val="50A14F"/>
                 </a:solidFill>
@@ -10571,7 +10571,7 @@
               <a:t>"%s\n"</a:t>
             </a:r>
             <a:r>
-              <a:rPr lang="en-US" altLang="ko-KR" sz="1600" b="0" i="0" u="none" strike="noStrike" dirty="0">
+              <a:rPr lang="en-US" altLang="ko-KR" sz="1600" b="1" i="0" u="none" strike="noStrike" dirty="0">
                 <a:solidFill>
                   <a:srgbClr val="383A42"/>
                 </a:solidFill>
@@ -10581,7 +10581,7 @@
               <a:t>, msg);</a:t>
             </a:r>
             <a:br>
-              <a:rPr lang="en-US" altLang="ko-KR" sz="1600" b="0" i="0" u="none" strike="noStrike" dirty="0">
+              <a:rPr lang="en-US" altLang="ko-KR" sz="1600" b="1" i="0" u="none" strike="noStrike" dirty="0">
                 <a:solidFill>
                   <a:srgbClr val="383A42"/>
                 </a:solidFill>
@@ -10590,7 +10590,7 @@
               </a:rPr>
             </a:br>
             <a:r>
-              <a:rPr lang="en-US" altLang="ko-KR" sz="1600" b="0" i="0" u="none" strike="noStrike" dirty="0">
+              <a:rPr lang="en-US" altLang="ko-KR" sz="1600" b="1" i="0" u="none" strike="noStrike" dirty="0">
                 <a:solidFill>
                   <a:srgbClr val="383A42"/>
                 </a:solidFill>
@@ -10600,7 +10600,7 @@
               <a:t>}</a:t>
             </a:r>
             <a:br>
-              <a:rPr lang="en-US" altLang="ko-KR" sz="1600" b="0" i="0" u="none" strike="noStrike" dirty="0">
+              <a:rPr lang="en-US" altLang="ko-KR" sz="1600" b="1" i="0" u="none" strike="noStrike" dirty="0">
                 <a:solidFill>
                   <a:srgbClr val="383A42"/>
                 </a:solidFill>
@@ -10609,7 +10609,7 @@
               </a:rPr>
             </a:br>
             <a:br>
-              <a:rPr lang="en-US" altLang="ko-KR" sz="1600" b="0" i="0" u="none" strike="noStrike" dirty="0">
+              <a:rPr lang="en-US" altLang="ko-KR" sz="1600" b="1" i="0" u="none" strike="noStrike" dirty="0">
                 <a:solidFill>
                   <a:srgbClr val="383A42"/>
                 </a:solidFill>
@@ -10618,7 +10618,7 @@
               </a:rPr>
             </a:br>
             <a:r>
-              <a:rPr lang="en-US" altLang="ko-KR" sz="1600" b="0" i="0" u="none" strike="noStrike" dirty="0">
+              <a:rPr lang="en-US" altLang="ko-KR" sz="1600" b="1" i="0" u="none" strike="noStrike" dirty="0">
                 <a:solidFill>
                   <a:srgbClr val="A626A4"/>
                 </a:solidFill>
@@ -10628,7 +10628,7 @@
               <a:t>int</a:t>
             </a:r>
             <a:r>
-              <a:rPr lang="en-US" altLang="ko-KR" sz="1600" b="0" i="0" u="none" strike="noStrike" dirty="0">
+              <a:rPr lang="en-US" altLang="ko-KR" sz="1600" b="1" i="0" u="none" strike="noStrike" dirty="0">
                 <a:solidFill>
                   <a:srgbClr val="383A42"/>
                 </a:solidFill>
@@ -10638,7 +10638,7 @@
               <a:t> </a:t>
             </a:r>
             <a:r>
-              <a:rPr lang="en-US" altLang="ko-KR" sz="1600" b="0" i="0" u="none" strike="noStrike" dirty="0">
+              <a:rPr lang="en-US" altLang="ko-KR" sz="1600" b="1" i="0" u="none" strike="noStrike" dirty="0">
                 <a:solidFill>
                   <a:srgbClr val="4078F2"/>
                 </a:solidFill>
@@ -10648,7 +10648,7 @@
               <a:t>main</a:t>
             </a:r>
             <a:r>
-              <a:rPr lang="en-US" altLang="ko-KR" sz="1600" b="0" i="0" u="none" strike="noStrike" dirty="0">
+              <a:rPr lang="en-US" altLang="ko-KR" sz="1600" b="1" i="0" u="none" strike="noStrike" dirty="0">
                 <a:solidFill>
                   <a:srgbClr val="383A42"/>
                 </a:solidFill>
@@ -10658,7 +10658,7 @@
               <a:t>(</a:t>
             </a:r>
             <a:r>
-              <a:rPr lang="en-US" altLang="ko-KR" sz="1600" b="0" i="0" u="none" strike="noStrike" dirty="0">
+              <a:rPr lang="en-US" altLang="ko-KR" sz="1600" b="1" i="0" u="none" strike="noStrike" dirty="0">
                 <a:solidFill>
                   <a:srgbClr val="A626A4"/>
                 </a:solidFill>
@@ -10668,7 +10668,7 @@
               <a:t>void</a:t>
             </a:r>
             <a:r>
-              <a:rPr lang="en-US" altLang="ko-KR" sz="1600" b="0" i="0" u="none" strike="noStrike" dirty="0">
+              <a:rPr lang="en-US" altLang="ko-KR" sz="1600" b="1" i="0" u="none" strike="noStrike" dirty="0">
                 <a:solidFill>
                   <a:srgbClr val="383A42"/>
                 </a:solidFill>
@@ -10678,7 +10678,7 @@
               <a:t>)</a:t>
             </a:r>
             <a:br>
-              <a:rPr lang="en-US" altLang="ko-KR" sz="1600" b="0" i="0" u="none" strike="noStrike" dirty="0">
+              <a:rPr lang="en-US" altLang="ko-KR" sz="1600" b="1" i="0" u="none" strike="noStrike" dirty="0">
                 <a:solidFill>
                   <a:srgbClr val="383A42"/>
                 </a:solidFill>
@@ -10687,7 +10687,7 @@
               </a:rPr>
             </a:br>
             <a:r>
-              <a:rPr lang="en-US" altLang="ko-KR" sz="1600" b="0" i="0" u="none" strike="noStrike" dirty="0">
+              <a:rPr lang="en-US" altLang="ko-KR" sz="1600" b="1" i="0" u="none" strike="noStrike" dirty="0">
                 <a:solidFill>
                   <a:srgbClr val="383A42"/>
                 </a:solidFill>
@@ -10697,7 +10697,7 @@
               <a:t>{</a:t>
             </a:r>
             <a:br>
-              <a:rPr lang="en-US" altLang="ko-KR" sz="1600" b="0" i="0" u="none" strike="noStrike" dirty="0">
+              <a:rPr lang="en-US" altLang="ko-KR" sz="1600" b="1" i="0" u="none" strike="noStrike" dirty="0">
                 <a:solidFill>
                   <a:srgbClr val="383A42"/>
                 </a:solidFill>
@@ -10706,7 +10706,7 @@
               </a:rPr>
             </a:br>
             <a:r>
-              <a:rPr lang="en-US" altLang="ko-KR" sz="1600" b="0" i="0" u="none" strike="noStrike" dirty="0">
+              <a:rPr lang="en-US" altLang="ko-KR" sz="1600" b="1" i="0" u="none" strike="noStrike" dirty="0">
                 <a:solidFill>
                   <a:srgbClr val="383A42"/>
                 </a:solidFill>
@@ -10716,7 +10716,7 @@
               <a:t>    </a:t>
             </a:r>
             <a:r>
-              <a:rPr lang="en-US" altLang="ko-KR" sz="1600" b="0" i="0" u="none" strike="noStrike" dirty="0">
+              <a:rPr lang="en-US" altLang="ko-KR" sz="1600" b="1" i="0" u="none" strike="noStrike" dirty="0">
                 <a:solidFill>
                   <a:srgbClr val="A626A4"/>
                 </a:solidFill>
@@ -10726,7 +10726,7 @@
               <a:t>const</a:t>
             </a:r>
             <a:r>
-              <a:rPr lang="en-US" altLang="ko-KR" sz="1600" b="0" i="0" u="none" strike="noStrike" dirty="0">
+              <a:rPr lang="en-US" altLang="ko-KR" sz="1600" b="1" i="0" u="none" strike="noStrike" dirty="0">
                 <a:solidFill>
                   <a:srgbClr val="383A42"/>
                 </a:solidFill>
@@ -10736,7 +10736,7 @@
               <a:t> </a:t>
             </a:r>
             <a:r>
-              <a:rPr lang="en-US" altLang="ko-KR" sz="1600" b="0" i="0" u="none" strike="noStrike" dirty="0">
+              <a:rPr lang="en-US" altLang="ko-KR" sz="1600" b="1" i="0" u="none" strike="noStrike" dirty="0">
                 <a:solidFill>
                   <a:srgbClr val="A626A4"/>
                 </a:solidFill>
@@ -10746,7 +10746,7 @@
               <a:t>char</a:t>
             </a:r>
             <a:r>
-              <a:rPr lang="en-US" altLang="ko-KR" sz="1600" b="0" i="0" u="none" strike="noStrike" dirty="0">
+              <a:rPr lang="en-US" altLang="ko-KR" sz="1600" b="1" i="0" u="none" strike="noStrike" dirty="0">
                 <a:solidFill>
                   <a:srgbClr val="383A42"/>
                 </a:solidFill>
@@ -10756,7 +10756,7 @@
               <a:t>* text = </a:t>
             </a:r>
             <a:r>
-              <a:rPr lang="en-US" altLang="ko-KR" sz="1600" b="0" i="0" u="none" strike="noStrike" dirty="0">
+              <a:rPr lang="en-US" altLang="ko-KR" sz="1600" b="1" i="0" u="none" strike="noStrike" dirty="0">
                 <a:solidFill>
                   <a:srgbClr val="50A14F"/>
                 </a:solidFill>
@@ -10766,7 +10766,7 @@
               <a:t>"</a:t>
             </a:r>
             <a:r>
-              <a:rPr lang="ko-KR" altLang="en-US" sz="1600" b="0" i="0" u="none" strike="noStrike" dirty="0">
+              <a:rPr lang="ko-KR" altLang="en-US" sz="1600" b="1" i="0" u="none" strike="noStrike" dirty="0">
                 <a:solidFill>
                   <a:srgbClr val="50A14F"/>
                 </a:solidFill>
@@ -10776,7 +10776,7 @@
               <a:t>안녕하세요</a:t>
             </a:r>
             <a:r>
-              <a:rPr lang="en-US" altLang="ko-KR" sz="1600" b="0" i="0" u="none" strike="noStrike" dirty="0">
+              <a:rPr lang="en-US" altLang="ko-KR" sz="1600" b="1" i="0" u="none" strike="noStrike" dirty="0">
                 <a:solidFill>
                   <a:srgbClr val="50A14F"/>
                 </a:solidFill>
@@ -10786,7 +10786,7 @@
               <a:t>, </a:t>
             </a:r>
             <a:r>
-              <a:rPr lang="ko-KR" altLang="en-US" sz="1600" b="0" i="0" u="none" strike="noStrike" dirty="0">
+              <a:rPr lang="ko-KR" altLang="en-US" sz="1600" b="1" i="0" u="none" strike="noStrike" dirty="0">
                 <a:solidFill>
                   <a:srgbClr val="50A14F"/>
                 </a:solidFill>
@@ -10796,7 +10796,7 @@
               <a:t>콜백입니다</a:t>
             </a:r>
             <a:r>
-              <a:rPr lang="en-US" altLang="ko-KR" sz="1600" b="0" i="0" u="none" strike="noStrike" dirty="0">
+              <a:rPr lang="en-US" altLang="ko-KR" sz="1600" b="1" i="0" u="none" strike="noStrike" dirty="0">
                 <a:solidFill>
                   <a:srgbClr val="50A14F"/>
                 </a:solidFill>
@@ -10806,7 +10806,7 @@
               <a:t>."</a:t>
             </a:r>
             <a:r>
-              <a:rPr lang="en-US" altLang="ko-KR" sz="1600" b="0" i="0" u="none" strike="noStrike" dirty="0">
+              <a:rPr lang="en-US" altLang="ko-KR" sz="1600" b="1" i="0" u="none" strike="noStrike" dirty="0">
                 <a:solidFill>
                   <a:srgbClr val="383A42"/>
                 </a:solidFill>
@@ -10816,7 +10816,7 @@
               <a:t>;</a:t>
             </a:r>
             <a:br>
-              <a:rPr lang="en-US" altLang="ko-KR" sz="1600" b="0" i="0" u="none" strike="noStrike" dirty="0">
+              <a:rPr lang="en-US" altLang="ko-KR" sz="1600" b="1" i="0" u="none" strike="noStrike" dirty="0">
                 <a:solidFill>
                   <a:srgbClr val="383A42"/>
                 </a:solidFill>
@@ -10825,7 +10825,7 @@
               </a:rPr>
             </a:br>
             <a:r>
-              <a:rPr lang="en-US" altLang="ko-KR" sz="1600" b="0" i="0" u="none" strike="noStrike" dirty="0">
+              <a:rPr lang="en-US" altLang="ko-KR" sz="1600" b="1" i="0" u="none" strike="noStrike" dirty="0">
                 <a:solidFill>
                   <a:srgbClr val="383A42"/>
                 </a:solidFill>
@@ -10835,7 +10835,7 @@
               <a:t>    InvokeThreeTimes(PrintMessage, (</a:t>
             </a:r>
             <a:r>
-              <a:rPr lang="en-US" altLang="ko-KR" sz="1600" b="0" i="0" u="none" strike="noStrike" dirty="0">
+              <a:rPr lang="en-US" altLang="ko-KR" sz="1600" b="1" i="0" u="none" strike="noStrike" dirty="0">
                 <a:solidFill>
                   <a:srgbClr val="A626A4"/>
                 </a:solidFill>
@@ -10845,7 +10845,7 @@
               <a:t>void</a:t>
             </a:r>
             <a:r>
-              <a:rPr lang="en-US" altLang="ko-KR" sz="1600" b="0" i="0" u="none" strike="noStrike" dirty="0">
+              <a:rPr lang="en-US" altLang="ko-KR" sz="1600" b="1" i="0" u="none" strike="noStrike" dirty="0">
                 <a:solidFill>
                   <a:srgbClr val="383A42"/>
                 </a:solidFill>
@@ -10855,7 +10855,7 @@
               <a:t>*)text);</a:t>
             </a:r>
             <a:br>
-              <a:rPr lang="en-US" altLang="ko-KR" sz="1600" b="0" i="0" u="none" strike="noStrike" dirty="0">
+              <a:rPr lang="en-US" altLang="ko-KR" sz="1600" b="1" i="0" u="none" strike="noStrike" dirty="0">
                 <a:solidFill>
                   <a:srgbClr val="383A42"/>
                 </a:solidFill>
@@ -10864,7 +10864,7 @@
               </a:rPr>
             </a:br>
             <a:r>
-              <a:rPr lang="en-US" altLang="ko-KR" sz="1600" b="0" i="0" u="none" strike="noStrike" dirty="0">
+              <a:rPr lang="en-US" altLang="ko-KR" sz="1600" b="1" i="0" u="none" strike="noStrike" dirty="0">
                 <a:solidFill>
                   <a:srgbClr val="383A42"/>
                 </a:solidFill>
@@ -10874,7 +10874,7 @@
               <a:t>    </a:t>
             </a:r>
             <a:r>
-              <a:rPr lang="en-US" altLang="ko-KR" sz="1600" b="0" i="0" u="none" strike="noStrike" dirty="0">
+              <a:rPr lang="en-US" altLang="ko-KR" sz="1600" b="1" i="0" u="none" strike="noStrike" dirty="0">
                 <a:solidFill>
                   <a:srgbClr val="A626A4"/>
                 </a:solidFill>
@@ -10884,7 +10884,7 @@
               <a:t>return</a:t>
             </a:r>
             <a:r>
-              <a:rPr lang="en-US" altLang="ko-KR" sz="1600" b="0" i="0" u="none" strike="noStrike" dirty="0">
+              <a:rPr lang="en-US" altLang="ko-KR" sz="1600" b="1" i="0" u="none" strike="noStrike" dirty="0">
                 <a:solidFill>
                   <a:srgbClr val="383A42"/>
                 </a:solidFill>
@@ -10894,7 +10894,7 @@
               <a:t> </a:t>
             </a:r>
             <a:r>
-              <a:rPr lang="en-US" altLang="ko-KR" sz="1600" b="0" i="0" u="none" strike="noStrike" dirty="0">
+              <a:rPr lang="en-US" altLang="ko-KR" sz="1600" b="1" i="0" u="none" strike="noStrike" dirty="0">
                 <a:solidFill>
                   <a:srgbClr val="986801"/>
                 </a:solidFill>
@@ -10904,7 +10904,7 @@
               <a:t>0</a:t>
             </a:r>
             <a:r>
-              <a:rPr lang="en-US" altLang="ko-KR" sz="1600" b="0" i="0" u="none" strike="noStrike" dirty="0">
+              <a:rPr lang="en-US" altLang="ko-KR" sz="1600" b="1" i="0" u="none" strike="noStrike" dirty="0">
                 <a:solidFill>
                   <a:srgbClr val="383A42"/>
                 </a:solidFill>
@@ -10914,7 +10914,7 @@
               <a:t>;</a:t>
             </a:r>
             <a:br>
-              <a:rPr lang="en-US" altLang="ko-KR" sz="1600" b="0" i="0" u="none" strike="noStrike" dirty="0">
+              <a:rPr lang="en-US" altLang="ko-KR" sz="1600" b="1" i="0" u="none" strike="noStrike" dirty="0">
                 <a:solidFill>
                   <a:srgbClr val="383A42"/>
                 </a:solidFill>
@@ -10923,7 +10923,7 @@
               </a:rPr>
             </a:br>
             <a:r>
-              <a:rPr lang="en-US" altLang="ko-KR" sz="1600" b="0" i="0" u="none" strike="noStrike" dirty="0">
+              <a:rPr lang="en-US" altLang="ko-KR" sz="1600" b="1" i="0" u="none" strike="noStrike" dirty="0">
                 <a:solidFill>
                   <a:srgbClr val="383A42"/>
                 </a:solidFill>
@@ -10932,7 +10932,7 @@
               </a:rPr>
               <a:t>}</a:t>
             </a:r>
-            <a:endParaRPr lang="ko-KR" altLang="en-US" sz="1600" dirty="0"/>
+            <a:endParaRPr lang="ko-KR" altLang="en-US" sz="1600" b="1" dirty="0"/>
           </a:p>
         </p:txBody>
       </p:sp>
@@ -19448,7 +19448,7 @@
           <a:lstStyle/>
           <a:p>
             <a:r>
-              <a:rPr lang="en-US" altLang="ko-KR" sz="2400" b="0" i="0" u="none" strike="noStrike" dirty="0">
+              <a:rPr lang="en-US" altLang="ko-KR" sz="2400" b="1" i="0" u="none" strike="noStrike" dirty="0">
                 <a:solidFill>
                   <a:srgbClr val="4078F2"/>
                 </a:solidFill>
@@ -19458,7 +19458,7 @@
               <a:t>#include </a:t>
             </a:r>
             <a:r>
-              <a:rPr lang="en-US" altLang="ko-KR" sz="2400" b="0" i="0" u="none" strike="noStrike" dirty="0">
+              <a:rPr lang="en-US" altLang="ko-KR" sz="2400" b="1" i="0" u="none" strike="noStrike" dirty="0">
                 <a:solidFill>
                   <a:srgbClr val="50A14F"/>
                 </a:solidFill>
@@ -19468,7 +19468,7 @@
               <a:t>&lt;stdio.h&gt;</a:t>
             </a:r>
             <a:br>
-              <a:rPr lang="en-US" altLang="ko-KR" sz="2400" b="0" i="0" u="none" strike="noStrike" dirty="0">
+              <a:rPr lang="en-US" altLang="ko-KR" sz="2400" b="1" i="0" u="none" strike="noStrike" dirty="0">
                 <a:solidFill>
                   <a:srgbClr val="383A42"/>
                 </a:solidFill>
@@ -19477,7 +19477,7 @@
               </a:rPr>
             </a:br>
             <a:br>
-              <a:rPr lang="en-US" altLang="ko-KR" sz="2400" b="0" i="0" u="none" strike="noStrike" dirty="0">
+              <a:rPr lang="en-US" altLang="ko-KR" sz="2400" b="1" i="0" u="none" strike="noStrike" dirty="0">
                 <a:solidFill>
                   <a:srgbClr val="383A42"/>
                 </a:solidFill>
@@ -19486,7 +19486,7 @@
               </a:rPr>
             </a:br>
             <a:r>
-              <a:rPr lang="en-US" altLang="ko-KR" sz="2400" b="0" i="0" u="none" strike="noStrike" dirty="0">
+              <a:rPr lang="en-US" altLang="ko-KR" sz="2400" b="1" i="0" u="none" strike="noStrike" dirty="0">
                 <a:solidFill>
                   <a:srgbClr val="A626A4"/>
                 </a:solidFill>
@@ -19496,7 +19496,7 @@
               <a:t>int</a:t>
             </a:r>
             <a:r>
-              <a:rPr lang="en-US" altLang="ko-KR" sz="2400" b="0" i="0" u="none" strike="noStrike" dirty="0">
+              <a:rPr lang="en-US" altLang="ko-KR" sz="2400" b="1" i="0" u="none" strike="noStrike" dirty="0">
                 <a:solidFill>
                   <a:srgbClr val="383A42"/>
                 </a:solidFill>
@@ -19506,7 +19506,7 @@
               <a:t> </a:t>
             </a:r>
             <a:r>
-              <a:rPr lang="en-US" altLang="ko-KR" sz="2400" b="0" i="0" u="none" strike="noStrike" dirty="0">
+              <a:rPr lang="en-US" altLang="ko-KR" sz="2400" b="1" i="0" u="none" strike="noStrike" dirty="0">
                 <a:solidFill>
                   <a:srgbClr val="4078F2"/>
                 </a:solidFill>
@@ -19516,7 +19516,7 @@
               <a:t>Add</a:t>
             </a:r>
             <a:r>
-              <a:rPr lang="en-US" altLang="ko-KR" sz="2400" b="0" i="0" u="none" strike="noStrike" dirty="0">
+              <a:rPr lang="en-US" altLang="ko-KR" sz="2400" b="1" i="0" u="none" strike="noStrike" dirty="0">
                 <a:solidFill>
                   <a:srgbClr val="383A42"/>
                 </a:solidFill>
@@ -19526,7 +19526,7 @@
               <a:t>(</a:t>
             </a:r>
             <a:r>
-              <a:rPr lang="en-US" altLang="ko-KR" sz="2400" b="0" i="0" u="none" strike="noStrike" dirty="0">
+              <a:rPr lang="en-US" altLang="ko-KR" sz="2400" b="1" i="0" u="none" strike="noStrike" dirty="0">
                 <a:solidFill>
                   <a:srgbClr val="A626A4"/>
                 </a:solidFill>
@@ -19536,7 +19536,7 @@
               <a:t>int</a:t>
             </a:r>
             <a:r>
-              <a:rPr lang="en-US" altLang="ko-KR" sz="2400" b="0" i="0" u="none" strike="noStrike" dirty="0">
+              <a:rPr lang="en-US" altLang="ko-KR" sz="2400" b="1" i="0" u="none" strike="noStrike" dirty="0">
                 <a:solidFill>
                   <a:srgbClr val="383A42"/>
                 </a:solidFill>
@@ -19546,7 +19546,7 @@
               <a:t> a, </a:t>
             </a:r>
             <a:r>
-              <a:rPr lang="en-US" altLang="ko-KR" sz="2400" b="0" i="0" u="none" strike="noStrike" dirty="0">
+              <a:rPr lang="en-US" altLang="ko-KR" sz="2400" b="1" i="0" u="none" strike="noStrike" dirty="0">
                 <a:solidFill>
                   <a:srgbClr val="A626A4"/>
                 </a:solidFill>
@@ -19556,7 +19556,7 @@
               <a:t>int</a:t>
             </a:r>
             <a:r>
-              <a:rPr lang="en-US" altLang="ko-KR" sz="2400" b="0" i="0" u="none" strike="noStrike" dirty="0">
+              <a:rPr lang="en-US" altLang="ko-KR" sz="2400" b="1" i="0" u="none" strike="noStrike" dirty="0">
                 <a:solidFill>
                   <a:srgbClr val="383A42"/>
                 </a:solidFill>
@@ -19566,7 +19566,7 @@
               <a:t> b) { </a:t>
             </a:r>
             <a:r>
-              <a:rPr lang="en-US" altLang="ko-KR" sz="2400" b="0" i="0" u="none" strike="noStrike" dirty="0">
+              <a:rPr lang="en-US" altLang="ko-KR" sz="2400" b="1" i="0" u="none" strike="noStrike" dirty="0">
                 <a:solidFill>
                   <a:srgbClr val="A626A4"/>
                 </a:solidFill>
@@ -19576,7 +19576,7 @@
               <a:t>return</a:t>
             </a:r>
             <a:r>
-              <a:rPr lang="en-US" altLang="ko-KR" sz="2400" b="0" i="0" u="none" strike="noStrike" dirty="0">
+              <a:rPr lang="en-US" altLang="ko-KR" sz="2400" b="1" i="0" u="none" strike="noStrike" dirty="0">
                 <a:solidFill>
                   <a:srgbClr val="383A42"/>
                 </a:solidFill>
@@ -19586,7 +19586,7 @@
               <a:t> a + b; }</a:t>
             </a:r>
             <a:br>
-              <a:rPr lang="en-US" altLang="ko-KR" sz="2400" b="0" i="0" u="none" strike="noStrike" dirty="0">
+              <a:rPr lang="en-US" altLang="ko-KR" sz="2400" b="1" i="0" u="none" strike="noStrike" dirty="0">
                 <a:solidFill>
                   <a:srgbClr val="383A42"/>
                 </a:solidFill>
@@ -19595,7 +19595,7 @@
               </a:rPr>
             </a:br>
             <a:r>
-              <a:rPr lang="en-US" altLang="ko-KR" sz="2400" b="0" i="0" u="none" strike="noStrike" dirty="0">
+              <a:rPr lang="en-US" altLang="ko-KR" sz="2400" b="1" i="0" u="none" strike="noStrike" dirty="0">
                 <a:solidFill>
                   <a:srgbClr val="A626A4"/>
                 </a:solidFill>
@@ -19605,7 +19605,7 @@
               <a:t>int</a:t>
             </a:r>
             <a:r>
-              <a:rPr lang="en-US" altLang="ko-KR" sz="2400" b="0" i="0" u="none" strike="noStrike" dirty="0">
+              <a:rPr lang="en-US" altLang="ko-KR" sz="2400" b="1" i="0" u="none" strike="noStrike" dirty="0">
                 <a:solidFill>
                   <a:srgbClr val="383A42"/>
                 </a:solidFill>
@@ -19615,7 +19615,7 @@
               <a:t> </a:t>
             </a:r>
             <a:r>
-              <a:rPr lang="en-US" altLang="ko-KR" sz="2400" b="0" i="0" u="none" strike="noStrike" dirty="0">
+              <a:rPr lang="en-US" altLang="ko-KR" sz="2400" b="1" i="0" u="none" strike="noStrike" dirty="0">
                 <a:solidFill>
                   <a:srgbClr val="4078F2"/>
                 </a:solidFill>
@@ -19625,7 +19625,7 @@
               <a:t>Mul</a:t>
             </a:r>
             <a:r>
-              <a:rPr lang="en-US" altLang="ko-KR" sz="2400" b="0" i="0" u="none" strike="noStrike" dirty="0">
+              <a:rPr lang="en-US" altLang="ko-KR" sz="2400" b="1" i="0" u="none" strike="noStrike" dirty="0">
                 <a:solidFill>
                   <a:srgbClr val="383A42"/>
                 </a:solidFill>
@@ -19635,7 +19635,7 @@
               <a:t>(</a:t>
             </a:r>
             <a:r>
-              <a:rPr lang="en-US" altLang="ko-KR" sz="2400" b="0" i="0" u="none" strike="noStrike" dirty="0">
+              <a:rPr lang="en-US" altLang="ko-KR" sz="2400" b="1" i="0" u="none" strike="noStrike" dirty="0">
                 <a:solidFill>
                   <a:srgbClr val="A626A4"/>
                 </a:solidFill>
@@ -19645,7 +19645,7 @@
               <a:t>int</a:t>
             </a:r>
             <a:r>
-              <a:rPr lang="en-US" altLang="ko-KR" sz="2400" b="0" i="0" u="none" strike="noStrike" dirty="0">
+              <a:rPr lang="en-US" altLang="ko-KR" sz="2400" b="1" i="0" u="none" strike="noStrike" dirty="0">
                 <a:solidFill>
                   <a:srgbClr val="383A42"/>
                 </a:solidFill>
@@ -19655,7 +19655,7 @@
               <a:t> a, </a:t>
             </a:r>
             <a:r>
-              <a:rPr lang="en-US" altLang="ko-KR" sz="2400" b="0" i="0" u="none" strike="noStrike" dirty="0">
+              <a:rPr lang="en-US" altLang="ko-KR" sz="2400" b="1" i="0" u="none" strike="noStrike" dirty="0">
                 <a:solidFill>
                   <a:srgbClr val="A626A4"/>
                 </a:solidFill>
@@ -19665,7 +19665,7 @@
               <a:t>int</a:t>
             </a:r>
             <a:r>
-              <a:rPr lang="en-US" altLang="ko-KR" sz="2400" b="0" i="0" u="none" strike="noStrike" dirty="0">
+              <a:rPr lang="en-US" altLang="ko-KR" sz="2400" b="1" i="0" u="none" strike="noStrike" dirty="0">
                 <a:solidFill>
                   <a:srgbClr val="383A42"/>
                 </a:solidFill>
@@ -19675,7 +19675,7 @@
               <a:t> b) { </a:t>
             </a:r>
             <a:r>
-              <a:rPr lang="en-US" altLang="ko-KR" sz="2400" b="0" i="0" u="none" strike="noStrike" dirty="0">
+              <a:rPr lang="en-US" altLang="ko-KR" sz="2400" b="1" i="0" u="none" strike="noStrike" dirty="0">
                 <a:solidFill>
                   <a:srgbClr val="A626A4"/>
                 </a:solidFill>
@@ -19685,7 +19685,7 @@
               <a:t>return</a:t>
             </a:r>
             <a:r>
-              <a:rPr lang="en-US" altLang="ko-KR" sz="2400" b="0" i="0" u="none" strike="noStrike" dirty="0">
+              <a:rPr lang="en-US" altLang="ko-KR" sz="2400" b="1" i="0" u="none" strike="noStrike" dirty="0">
                 <a:solidFill>
                   <a:srgbClr val="383A42"/>
                 </a:solidFill>
@@ -19695,7 +19695,7 @@
               <a:t> a * b; }</a:t>
             </a:r>
             <a:br>
-              <a:rPr lang="en-US" altLang="ko-KR" sz="2400" b="0" i="0" u="none" strike="noStrike" dirty="0">
+              <a:rPr lang="en-US" altLang="ko-KR" sz="2400" b="1" i="0" u="none" strike="noStrike" dirty="0">
                 <a:solidFill>
                   <a:srgbClr val="383A42"/>
                 </a:solidFill>
@@ -19704,7 +19704,7 @@
               </a:rPr>
             </a:br>
             <a:br>
-              <a:rPr lang="en-US" altLang="ko-KR" sz="2400" b="0" i="0" u="none" strike="noStrike" dirty="0">
+              <a:rPr lang="en-US" altLang="ko-KR" sz="2400" b="1" i="0" u="none" strike="noStrike" dirty="0">
                 <a:solidFill>
                   <a:srgbClr val="383A42"/>
                 </a:solidFill>
@@ -19713,7 +19713,7 @@
               </a:rPr>
             </a:br>
             <a:r>
-              <a:rPr lang="en-US" altLang="ko-KR" sz="2400" b="0" i="0" u="none" strike="noStrike" dirty="0">
+              <a:rPr lang="en-US" altLang="ko-KR" sz="2400" b="1" i="0" u="none" strike="noStrike" dirty="0">
                 <a:solidFill>
                   <a:srgbClr val="A626A4"/>
                 </a:solidFill>
@@ -19723,7 +19723,7 @@
               <a:t>int</a:t>
             </a:r>
             <a:r>
-              <a:rPr lang="en-US" altLang="ko-KR" sz="2400" b="0" i="0" u="none" strike="noStrike" dirty="0">
+              <a:rPr lang="en-US" altLang="ko-KR" sz="2400" b="1" i="0" u="none" strike="noStrike" dirty="0">
                 <a:solidFill>
                   <a:srgbClr val="383A42"/>
                 </a:solidFill>
@@ -19733,7 +19733,7 @@
               <a:t> </a:t>
             </a:r>
             <a:r>
-              <a:rPr lang="en-US" altLang="ko-KR" sz="2400" b="0" i="0" u="none" strike="noStrike" dirty="0">
+              <a:rPr lang="en-US" altLang="ko-KR" sz="2400" b="1" i="0" u="none" strike="noStrike" dirty="0">
                 <a:solidFill>
                   <a:srgbClr val="4078F2"/>
                 </a:solidFill>
@@ -19743,7 +19743,7 @@
               <a:t>main</a:t>
             </a:r>
             <a:r>
-              <a:rPr lang="en-US" altLang="ko-KR" sz="2400" b="0" i="0" u="none" strike="noStrike" dirty="0">
+              <a:rPr lang="en-US" altLang="ko-KR" sz="2400" b="1" i="0" u="none" strike="noStrike" dirty="0">
                 <a:solidFill>
                   <a:srgbClr val="383A42"/>
                 </a:solidFill>
@@ -19753,7 +19753,7 @@
               <a:t>(</a:t>
             </a:r>
             <a:r>
-              <a:rPr lang="en-US" altLang="ko-KR" sz="2400" b="0" i="0" u="none" strike="noStrike" dirty="0">
+              <a:rPr lang="en-US" altLang="ko-KR" sz="2400" b="1" i="0" u="none" strike="noStrike" dirty="0">
                 <a:solidFill>
                   <a:srgbClr val="A626A4"/>
                 </a:solidFill>
@@ -19763,7 +19763,7 @@
               <a:t>void</a:t>
             </a:r>
             <a:r>
-              <a:rPr lang="en-US" altLang="ko-KR" sz="2400" b="0" i="0" u="none" strike="noStrike" dirty="0">
+              <a:rPr lang="en-US" altLang="ko-KR" sz="2400" b="1" i="0" u="none" strike="noStrike" dirty="0">
                 <a:solidFill>
                   <a:srgbClr val="383A42"/>
                 </a:solidFill>
@@ -19773,7 +19773,7 @@
               <a:t>)</a:t>
             </a:r>
             <a:br>
-              <a:rPr lang="en-US" altLang="ko-KR" sz="2400" b="0" i="0" u="none" strike="noStrike" dirty="0">
+              <a:rPr lang="en-US" altLang="ko-KR" sz="2400" b="1" i="0" u="none" strike="noStrike" dirty="0">
                 <a:solidFill>
                   <a:srgbClr val="383A42"/>
                 </a:solidFill>
@@ -19782,7 +19782,7 @@
               </a:rPr>
             </a:br>
             <a:r>
-              <a:rPr lang="en-US" altLang="ko-KR" sz="2400" b="0" i="0" u="none" strike="noStrike" dirty="0">
+              <a:rPr lang="en-US" altLang="ko-KR" sz="2400" b="1" i="0" u="none" strike="noStrike" dirty="0">
                 <a:solidFill>
                   <a:srgbClr val="383A42"/>
                 </a:solidFill>
@@ -19792,7 +19792,7 @@
               <a:t>{</a:t>
             </a:r>
             <a:br>
-              <a:rPr lang="en-US" altLang="ko-KR" sz="2400" b="0" i="0" u="none" strike="noStrike" dirty="0">
+              <a:rPr lang="en-US" altLang="ko-KR" sz="2400" b="1" i="0" u="none" strike="noStrike" dirty="0">
                 <a:solidFill>
                   <a:srgbClr val="383A42"/>
                 </a:solidFill>
@@ -19801,7 +19801,7 @@
               </a:rPr>
             </a:br>
             <a:r>
-              <a:rPr lang="en-US" altLang="ko-KR" sz="2400" b="0" i="0" u="none" strike="noStrike" dirty="0">
+              <a:rPr lang="en-US" altLang="ko-KR" sz="2400" b="1" i="0" u="none" strike="noStrike" dirty="0">
                 <a:solidFill>
                   <a:srgbClr val="383A42"/>
                 </a:solidFill>
@@ -19811,7 +19811,7 @@
               <a:t>    </a:t>
             </a:r>
             <a:r>
-              <a:rPr lang="en-US" altLang="ko-KR" sz="2400" b="0" i="0" u="none" strike="noStrike" dirty="0">
+              <a:rPr lang="en-US" altLang="ko-KR" sz="2400" b="1" i="0" u="none" strike="noStrike" dirty="0">
                 <a:solidFill>
                   <a:srgbClr val="A626A4"/>
                 </a:solidFill>
@@ -19821,7 +19821,7 @@
               <a:t>int</a:t>
             </a:r>
             <a:r>
-              <a:rPr lang="en-US" altLang="ko-KR" sz="2400" b="0" i="0" u="none" strike="noStrike" dirty="0">
+              <a:rPr lang="en-US" altLang="ko-KR" sz="2400" b="1" i="0" u="none" strike="noStrike" dirty="0">
                 <a:solidFill>
                   <a:srgbClr val="383A42"/>
                 </a:solidFill>
@@ -19831,7 +19831,7 @@
               <a:t> (*fp)(</a:t>
             </a:r>
             <a:r>
-              <a:rPr lang="en-US" altLang="ko-KR" sz="2400" b="0" i="0" u="none" strike="noStrike" dirty="0">
+              <a:rPr lang="en-US" altLang="ko-KR" sz="2400" b="1" i="0" u="none" strike="noStrike" dirty="0">
                 <a:solidFill>
                   <a:srgbClr val="A626A4"/>
                 </a:solidFill>
@@ -19841,7 +19841,7 @@
               <a:t>int</a:t>
             </a:r>
             <a:r>
-              <a:rPr lang="en-US" altLang="ko-KR" sz="2400" b="0" i="0" u="none" strike="noStrike" dirty="0">
+              <a:rPr lang="en-US" altLang="ko-KR" sz="2400" b="1" i="0" u="none" strike="noStrike" dirty="0">
                 <a:solidFill>
                   <a:srgbClr val="383A42"/>
                 </a:solidFill>
@@ -19851,7 +19851,7 @@
               <a:t>, </a:t>
             </a:r>
             <a:r>
-              <a:rPr lang="en-US" altLang="ko-KR" sz="2400" b="0" i="0" u="none" strike="noStrike" dirty="0">
+              <a:rPr lang="en-US" altLang="ko-KR" sz="2400" b="1" i="0" u="none" strike="noStrike" dirty="0">
                 <a:solidFill>
                   <a:srgbClr val="A626A4"/>
                 </a:solidFill>
@@ -19861,7 +19861,7 @@
               <a:t>int</a:t>
             </a:r>
             <a:r>
-              <a:rPr lang="en-US" altLang="ko-KR" sz="2400" b="0" i="0" u="none" strike="noStrike" dirty="0">
+              <a:rPr lang="en-US" altLang="ko-KR" sz="2400" b="1" i="0" u="none" strike="noStrike" dirty="0">
                 <a:solidFill>
                   <a:srgbClr val="383A42"/>
                 </a:solidFill>
@@ -19871,7 +19871,7 @@
               <a:t>);</a:t>
             </a:r>
             <a:br>
-              <a:rPr lang="en-US" altLang="ko-KR" sz="2400" b="0" i="0" u="none" strike="noStrike" dirty="0">
+              <a:rPr lang="en-US" altLang="ko-KR" sz="2400" b="1" i="0" u="none" strike="noStrike" dirty="0">
                 <a:solidFill>
                   <a:srgbClr val="383A42"/>
                 </a:solidFill>
@@ -19880,7 +19880,7 @@
               </a:rPr>
             </a:br>
             <a:r>
-              <a:rPr lang="en-US" altLang="ko-KR" sz="2400" b="0" i="0" u="none" strike="noStrike" dirty="0">
+              <a:rPr lang="en-US" altLang="ko-KR" sz="2400" b="1" i="0" u="none" strike="noStrike" dirty="0">
                 <a:solidFill>
                   <a:srgbClr val="383A42"/>
                 </a:solidFill>
@@ -19890,7 +19890,7 @@
               <a:t>    fp = Add;</a:t>
             </a:r>
             <a:br>
-              <a:rPr lang="en-US" altLang="ko-KR" sz="2400" b="0" i="0" u="none" strike="noStrike" dirty="0">
+              <a:rPr lang="en-US" altLang="ko-KR" sz="2400" b="1" i="0" u="none" strike="noStrike" dirty="0">
                 <a:solidFill>
                   <a:srgbClr val="383A42"/>
                 </a:solidFill>
@@ -19899,7 +19899,7 @@
               </a:rPr>
             </a:br>
             <a:r>
-              <a:rPr lang="en-US" altLang="ko-KR" sz="2400" b="0" i="0" u="none" strike="noStrike" dirty="0">
+              <a:rPr lang="en-US" altLang="ko-KR" sz="2400" b="1" i="0" u="none" strike="noStrike" dirty="0">
                 <a:solidFill>
                   <a:srgbClr val="383A42"/>
                 </a:solidFill>
@@ -19909,7 +19909,7 @@
               <a:t>    </a:t>
             </a:r>
             <a:r>
-              <a:rPr lang="en-US" altLang="ko-KR" sz="2400" b="0" i="0" u="none" strike="noStrike" dirty="0">
+              <a:rPr lang="en-US" altLang="ko-KR" sz="2400" b="1" i="0" u="none" strike="noStrike" dirty="0">
                 <a:solidFill>
                   <a:srgbClr val="C18401"/>
                 </a:solidFill>
@@ -19919,7 +19919,7 @@
               <a:t>printf</a:t>
             </a:r>
             <a:r>
-              <a:rPr lang="en-US" altLang="ko-KR" sz="2400" b="0" i="0" u="none" strike="noStrike" dirty="0">
+              <a:rPr lang="en-US" altLang="ko-KR" sz="2400" b="1" i="0" u="none" strike="noStrike" dirty="0">
                 <a:solidFill>
                   <a:srgbClr val="383A42"/>
                 </a:solidFill>
@@ -19929,7 +19929,7 @@
               <a:t>(</a:t>
             </a:r>
             <a:r>
-              <a:rPr lang="en-US" altLang="ko-KR" sz="2400" b="0" i="0" u="none" strike="noStrike" dirty="0">
+              <a:rPr lang="en-US" altLang="ko-KR" sz="2400" b="1" i="0" u="none" strike="noStrike" dirty="0">
                 <a:solidFill>
                   <a:srgbClr val="50A14F"/>
                 </a:solidFill>
@@ -19939,7 +19939,7 @@
               <a:t>"Add </a:t>
             </a:r>
             <a:r>
-              <a:rPr lang="ko-KR" altLang="en-US" sz="2400" b="0" i="0" u="none" strike="noStrike" dirty="0">
+              <a:rPr lang="ko-KR" altLang="en-US" sz="2400" b="1" i="0" u="none" strike="noStrike" dirty="0">
                 <a:solidFill>
                   <a:srgbClr val="50A14F"/>
                 </a:solidFill>
@@ -19949,7 +19949,7 @@
               <a:t>결과</a:t>
             </a:r>
             <a:r>
-              <a:rPr lang="en-US" altLang="ko-KR" sz="2400" b="0" i="0" u="none" strike="noStrike" dirty="0">
+              <a:rPr lang="en-US" altLang="ko-KR" sz="2400" b="1" i="0" u="none" strike="noStrike" dirty="0">
                 <a:solidFill>
                   <a:srgbClr val="50A14F"/>
                 </a:solidFill>
@@ -19959,7 +19959,7 @@
               <a:t>: %d\n"</a:t>
             </a:r>
             <a:r>
-              <a:rPr lang="en-US" altLang="ko-KR" sz="2400" b="0" i="0" u="none" strike="noStrike" dirty="0">
+              <a:rPr lang="en-US" altLang="ko-KR" sz="2400" b="1" i="0" u="none" strike="noStrike" dirty="0">
                 <a:solidFill>
                   <a:srgbClr val="383A42"/>
                 </a:solidFill>
@@ -19969,7 +19969,7 @@
               <a:t>, fp(</a:t>
             </a:r>
             <a:r>
-              <a:rPr lang="en-US" altLang="ko-KR" sz="2400" b="0" i="0" u="none" strike="noStrike" dirty="0">
+              <a:rPr lang="en-US" altLang="ko-KR" sz="2400" b="1" i="0" u="none" strike="noStrike" dirty="0">
                 <a:solidFill>
                   <a:srgbClr val="986801"/>
                 </a:solidFill>
@@ -19979,7 +19979,7 @@
               <a:t>10</a:t>
             </a:r>
             <a:r>
-              <a:rPr lang="en-US" altLang="ko-KR" sz="2400" b="0" i="0" u="none" strike="noStrike" dirty="0">
+              <a:rPr lang="en-US" altLang="ko-KR" sz="2400" b="1" i="0" u="none" strike="noStrike" dirty="0">
                 <a:solidFill>
                   <a:srgbClr val="383A42"/>
                 </a:solidFill>
@@ -19989,7 +19989,7 @@
               <a:t>, </a:t>
             </a:r>
             <a:r>
-              <a:rPr lang="en-US" altLang="ko-KR" sz="2400" b="0" i="0" u="none" strike="noStrike" dirty="0">
+              <a:rPr lang="en-US" altLang="ko-KR" sz="2400" b="1" i="0" u="none" strike="noStrike" dirty="0">
                 <a:solidFill>
                   <a:srgbClr val="986801"/>
                 </a:solidFill>
@@ -19999,7 +19999,7 @@
               <a:t>20</a:t>
             </a:r>
             <a:r>
-              <a:rPr lang="en-US" altLang="ko-KR" sz="2400" b="0" i="0" u="none" strike="noStrike" dirty="0">
+              <a:rPr lang="en-US" altLang="ko-KR" sz="2400" b="1" i="0" u="none" strike="noStrike" dirty="0">
                 <a:solidFill>
                   <a:srgbClr val="383A42"/>
                 </a:solidFill>
@@ -20009,7 +20009,7 @@
               <a:t>));</a:t>
             </a:r>
             <a:br>
-              <a:rPr lang="en-US" altLang="ko-KR" sz="2400" b="0" i="0" u="none" strike="noStrike" dirty="0">
+              <a:rPr lang="en-US" altLang="ko-KR" sz="2400" b="1" i="0" u="none" strike="noStrike" dirty="0">
                 <a:solidFill>
                   <a:srgbClr val="383A42"/>
                 </a:solidFill>
@@ -20018,7 +20018,7 @@
               </a:rPr>
             </a:br>
             <a:r>
-              <a:rPr lang="en-US" altLang="ko-KR" sz="2400" b="0" i="0" u="none" strike="noStrike" dirty="0">
+              <a:rPr lang="en-US" altLang="ko-KR" sz="2400" b="1" i="0" u="none" strike="noStrike" dirty="0">
                 <a:solidFill>
                   <a:srgbClr val="383A42"/>
                 </a:solidFill>
@@ -20028,7 +20028,7 @@
               <a:t>    fp = Mul;</a:t>
             </a:r>
             <a:br>
-              <a:rPr lang="en-US" altLang="ko-KR" sz="2400" b="0" i="0" u="none" strike="noStrike" dirty="0">
+              <a:rPr lang="en-US" altLang="ko-KR" sz="2400" b="1" i="0" u="none" strike="noStrike" dirty="0">
                 <a:solidFill>
                   <a:srgbClr val="383A42"/>
                 </a:solidFill>
@@ -20037,7 +20037,7 @@
               </a:rPr>
             </a:br>
             <a:r>
-              <a:rPr lang="en-US" altLang="ko-KR" sz="2400" b="0" i="0" u="none" strike="noStrike" dirty="0">
+              <a:rPr lang="en-US" altLang="ko-KR" sz="2400" b="1" i="0" u="none" strike="noStrike" dirty="0">
                 <a:solidFill>
                   <a:srgbClr val="383A42"/>
                 </a:solidFill>
@@ -20047,7 +20047,7 @@
               <a:t>    </a:t>
             </a:r>
             <a:r>
-              <a:rPr lang="en-US" altLang="ko-KR" sz="2400" b="0" i="0" u="none" strike="noStrike" dirty="0">
+              <a:rPr lang="en-US" altLang="ko-KR" sz="2400" b="1" i="0" u="none" strike="noStrike" dirty="0">
                 <a:solidFill>
                   <a:srgbClr val="C18401"/>
                 </a:solidFill>
@@ -20057,7 +20057,7 @@
               <a:t>printf</a:t>
             </a:r>
             <a:r>
-              <a:rPr lang="en-US" altLang="ko-KR" sz="2400" b="0" i="0" u="none" strike="noStrike" dirty="0">
+              <a:rPr lang="en-US" altLang="ko-KR" sz="2400" b="1" i="0" u="none" strike="noStrike" dirty="0">
                 <a:solidFill>
                   <a:srgbClr val="383A42"/>
                 </a:solidFill>
@@ -20067,7 +20067,7 @@
               <a:t>(</a:t>
             </a:r>
             <a:r>
-              <a:rPr lang="en-US" altLang="ko-KR" sz="2400" b="0" i="0" u="none" strike="noStrike" dirty="0">
+              <a:rPr lang="en-US" altLang="ko-KR" sz="2400" b="1" i="0" u="none" strike="noStrike" dirty="0">
                 <a:solidFill>
                   <a:srgbClr val="50A14F"/>
                 </a:solidFill>
@@ -20077,7 +20077,7 @@
               <a:t>"Mul </a:t>
             </a:r>
             <a:r>
-              <a:rPr lang="ko-KR" altLang="en-US" sz="2400" b="0" i="0" u="none" strike="noStrike" dirty="0">
+              <a:rPr lang="ko-KR" altLang="en-US" sz="2400" b="1" i="0" u="none" strike="noStrike" dirty="0">
                 <a:solidFill>
                   <a:srgbClr val="50A14F"/>
                 </a:solidFill>
@@ -20087,7 +20087,7 @@
               <a:t>결과</a:t>
             </a:r>
             <a:r>
-              <a:rPr lang="en-US" altLang="ko-KR" sz="2400" b="0" i="0" u="none" strike="noStrike" dirty="0">
+              <a:rPr lang="en-US" altLang="ko-KR" sz="2400" b="1" i="0" u="none" strike="noStrike" dirty="0">
                 <a:solidFill>
                   <a:srgbClr val="50A14F"/>
                 </a:solidFill>
@@ -20097,7 +20097,7 @@
               <a:t>: %d\n"</a:t>
             </a:r>
             <a:r>
-              <a:rPr lang="en-US" altLang="ko-KR" sz="2400" b="0" i="0" u="none" strike="noStrike" dirty="0">
+              <a:rPr lang="en-US" altLang="ko-KR" sz="2400" b="1" i="0" u="none" strike="noStrike" dirty="0">
                 <a:solidFill>
                   <a:srgbClr val="383A42"/>
                 </a:solidFill>
@@ -20107,7 +20107,7 @@
               <a:t>, fp(</a:t>
             </a:r>
             <a:r>
-              <a:rPr lang="en-US" altLang="ko-KR" sz="2400" b="0" i="0" u="none" strike="noStrike" dirty="0">
+              <a:rPr lang="en-US" altLang="ko-KR" sz="2400" b="1" i="0" u="none" strike="noStrike" dirty="0">
                 <a:solidFill>
                   <a:srgbClr val="986801"/>
                 </a:solidFill>
@@ -20117,7 +20117,7 @@
               <a:t>10</a:t>
             </a:r>
             <a:r>
-              <a:rPr lang="en-US" altLang="ko-KR" sz="2400" b="0" i="0" u="none" strike="noStrike" dirty="0">
+              <a:rPr lang="en-US" altLang="ko-KR" sz="2400" b="1" i="0" u="none" strike="noStrike" dirty="0">
                 <a:solidFill>
                   <a:srgbClr val="383A42"/>
                 </a:solidFill>
@@ -20127,7 +20127,7 @@
               <a:t>, </a:t>
             </a:r>
             <a:r>
-              <a:rPr lang="en-US" altLang="ko-KR" sz="2400" b="0" i="0" u="none" strike="noStrike" dirty="0">
+              <a:rPr lang="en-US" altLang="ko-KR" sz="2400" b="1" i="0" u="none" strike="noStrike" dirty="0">
                 <a:solidFill>
                   <a:srgbClr val="986801"/>
                 </a:solidFill>
@@ -20137,7 +20137,7 @@
               <a:t>20</a:t>
             </a:r>
             <a:r>
-              <a:rPr lang="en-US" altLang="ko-KR" sz="2400" b="0" i="0" u="none" strike="noStrike" dirty="0">
+              <a:rPr lang="en-US" altLang="ko-KR" sz="2400" b="1" i="0" u="none" strike="noStrike" dirty="0">
                 <a:solidFill>
                   <a:srgbClr val="383A42"/>
                 </a:solidFill>
@@ -20147,7 +20147,7 @@
               <a:t>));</a:t>
             </a:r>
             <a:br>
-              <a:rPr lang="en-US" altLang="ko-KR" sz="2400" b="0" i="0" u="none" strike="noStrike" dirty="0">
+              <a:rPr lang="en-US" altLang="ko-KR" sz="2400" b="1" i="0" u="none" strike="noStrike" dirty="0">
                 <a:solidFill>
                   <a:srgbClr val="383A42"/>
                 </a:solidFill>
@@ -20156,7 +20156,7 @@
               </a:rPr>
             </a:br>
             <a:r>
-              <a:rPr lang="en-US" altLang="ko-KR" sz="2400" b="0" i="0" u="none" strike="noStrike" dirty="0">
+              <a:rPr lang="en-US" altLang="ko-KR" sz="2400" b="1" i="0" u="none" strike="noStrike" dirty="0">
                 <a:solidFill>
                   <a:srgbClr val="383A42"/>
                 </a:solidFill>
@@ -20166,7 +20166,7 @@
               <a:t>    </a:t>
             </a:r>
             <a:r>
-              <a:rPr lang="en-US" altLang="ko-KR" sz="2400" b="0" i="0" u="none" strike="noStrike" dirty="0">
+              <a:rPr lang="en-US" altLang="ko-KR" sz="2400" b="1" i="0" u="none" strike="noStrike" dirty="0">
                 <a:solidFill>
                   <a:srgbClr val="A626A4"/>
                 </a:solidFill>
@@ -20176,7 +20176,7 @@
               <a:t>return</a:t>
             </a:r>
             <a:r>
-              <a:rPr lang="en-US" altLang="ko-KR" sz="2400" b="0" i="0" u="none" strike="noStrike" dirty="0">
+              <a:rPr lang="en-US" altLang="ko-KR" sz="2400" b="1" i="0" u="none" strike="noStrike" dirty="0">
                 <a:solidFill>
                   <a:srgbClr val="383A42"/>
                 </a:solidFill>
@@ -20186,7 +20186,7 @@
               <a:t> </a:t>
             </a:r>
             <a:r>
-              <a:rPr lang="en-US" altLang="ko-KR" sz="2400" b="0" i="0" u="none" strike="noStrike" dirty="0">
+              <a:rPr lang="en-US" altLang="ko-KR" sz="2400" b="1" i="0" u="none" strike="noStrike" dirty="0">
                 <a:solidFill>
                   <a:srgbClr val="986801"/>
                 </a:solidFill>
@@ -20196,7 +20196,7 @@
               <a:t>0</a:t>
             </a:r>
             <a:r>
-              <a:rPr lang="en-US" altLang="ko-KR" sz="2400" b="0" i="0" u="none" strike="noStrike" dirty="0">
+              <a:rPr lang="en-US" altLang="ko-KR" sz="2400" b="1" i="0" u="none" strike="noStrike" dirty="0">
                 <a:solidFill>
                   <a:srgbClr val="383A42"/>
                 </a:solidFill>
@@ -20206,7 +20206,7 @@
               <a:t>;</a:t>
             </a:r>
             <a:br>
-              <a:rPr lang="en-US" altLang="ko-KR" sz="2400" b="0" i="0" u="none" strike="noStrike" dirty="0">
+              <a:rPr lang="en-US" altLang="ko-KR" sz="2400" b="1" i="0" u="none" strike="noStrike" dirty="0">
                 <a:solidFill>
                   <a:srgbClr val="383A42"/>
                 </a:solidFill>
@@ -20215,7 +20215,7 @@
               </a:rPr>
             </a:br>
             <a:r>
-              <a:rPr lang="en-US" altLang="ko-KR" sz="2400" b="0" i="0" u="none" strike="noStrike" dirty="0">
+              <a:rPr lang="en-US" altLang="ko-KR" sz="2400" b="1" i="0" u="none" strike="noStrike" dirty="0">
                 <a:solidFill>
                   <a:srgbClr val="383A42"/>
                 </a:solidFill>
@@ -20224,7 +20224,7 @@
               </a:rPr>
               <a:t>}</a:t>
             </a:r>
-            <a:endParaRPr lang="ko-KR" altLang="en-US" dirty="0"/>
+            <a:endParaRPr lang="ko-KR" altLang="en-US" b="1" dirty="0"/>
           </a:p>
         </p:txBody>
       </p:sp>
@@ -20433,7 +20433,7 @@
           <a:lstStyle/>
           <a:p>
             <a:r>
-              <a:rPr lang="en-US" altLang="ko-KR" sz="1600" b="0" i="0" u="none" strike="noStrike" dirty="0">
+              <a:rPr lang="en-US" altLang="ko-KR" sz="1600" b="1" i="0" u="none" strike="noStrike" dirty="0">
                 <a:solidFill>
                   <a:srgbClr val="A626A4"/>
                 </a:solidFill>
@@ -20443,7 +20443,7 @@
               <a:t>typedef</a:t>
             </a:r>
             <a:r>
-              <a:rPr lang="en-US" altLang="ko-KR" sz="1600" b="0" i="0" u="none" strike="noStrike" dirty="0">
+              <a:rPr lang="en-US" altLang="ko-KR" sz="1600" b="1" i="0" u="none" strike="noStrike" dirty="0">
                 <a:solidFill>
                   <a:srgbClr val="383A42"/>
                 </a:solidFill>
@@ -20453,7 +20453,7 @@
               <a:t> </a:t>
             </a:r>
             <a:r>
-              <a:rPr lang="en-US" altLang="ko-KR" sz="1600" b="0" i="0" u="none" strike="noStrike" dirty="0">
+              <a:rPr lang="en-US" altLang="ko-KR" sz="1600" b="1" i="0" u="none" strike="noStrike" dirty="0">
                 <a:solidFill>
                   <a:srgbClr val="4078F2"/>
                 </a:solidFill>
@@ -20463,7 +20463,7 @@
               <a:t>void</a:t>
             </a:r>
             <a:r>
-              <a:rPr lang="en-US" altLang="ko-KR" sz="1600" b="0" i="0" u="none" strike="noStrike" dirty="0">
+              <a:rPr lang="en-US" altLang="ko-KR" sz="1600" b="1" i="0" u="none" strike="noStrike" dirty="0">
                 <a:solidFill>
                   <a:srgbClr val="383A42"/>
                 </a:solidFill>
@@ -20473,7 +20473,7 @@
               <a:t> (*OnEvent)(</a:t>
             </a:r>
             <a:r>
-              <a:rPr lang="en-US" altLang="ko-KR" sz="1600" b="0" i="0" u="none" strike="noStrike" dirty="0">
+              <a:rPr lang="en-US" altLang="ko-KR" sz="1600" b="1" i="0" u="none" strike="noStrike" dirty="0">
                 <a:solidFill>
                   <a:srgbClr val="A626A4"/>
                 </a:solidFill>
@@ -20483,7 +20483,7 @@
               <a:t>int</a:t>
             </a:r>
             <a:r>
-              <a:rPr lang="en-US" altLang="ko-KR" sz="1600" b="0" i="0" u="none" strike="noStrike" dirty="0">
+              <a:rPr lang="en-US" altLang="ko-KR" sz="1600" b="1" i="0" u="none" strike="noStrike" dirty="0">
                 <a:solidFill>
                   <a:srgbClr val="383A42"/>
                 </a:solidFill>
@@ -20493,7 +20493,7 @@
               <a:t> eventCode, </a:t>
             </a:r>
             <a:r>
-              <a:rPr lang="en-US" altLang="ko-KR" sz="1600" b="0" i="0" u="none" strike="noStrike" dirty="0">
+              <a:rPr lang="en-US" altLang="ko-KR" sz="1600" b="1" i="0" u="none" strike="noStrike" dirty="0">
                 <a:solidFill>
                   <a:srgbClr val="A626A4"/>
                 </a:solidFill>
@@ -20503,7 +20503,7 @@
               <a:t>void</a:t>
             </a:r>
             <a:r>
-              <a:rPr lang="en-US" altLang="ko-KR" sz="1600" b="0" i="0" u="none" strike="noStrike" dirty="0">
+              <a:rPr lang="en-US" altLang="ko-KR" sz="1600" b="1" i="0" u="none" strike="noStrike" dirty="0">
                 <a:solidFill>
                   <a:srgbClr val="383A42"/>
                 </a:solidFill>
@@ -20513,7 +20513,7 @@
               <a:t>* userData);</a:t>
             </a:r>
             <a:br>
-              <a:rPr lang="en-US" altLang="ko-KR" sz="1600" b="0" i="0" u="none" strike="noStrike" dirty="0">
+              <a:rPr lang="en-US" altLang="ko-KR" sz="1600" b="1" i="0" u="none" strike="noStrike" dirty="0">
                 <a:solidFill>
                   <a:srgbClr val="383A42"/>
                 </a:solidFill>
@@ -20522,7 +20522,7 @@
               </a:rPr>
             </a:br>
             <a:br>
-              <a:rPr lang="en-US" altLang="ko-KR" sz="1600" b="0" i="0" u="none" strike="noStrike" dirty="0">
+              <a:rPr lang="en-US" altLang="ko-KR" sz="1600" b="1" i="0" u="none" strike="noStrike" dirty="0">
                 <a:solidFill>
                   <a:srgbClr val="383A42"/>
                 </a:solidFill>
@@ -20531,7 +20531,7 @@
               </a:rPr>
             </a:br>
             <a:r>
-              <a:rPr lang="en-US" altLang="ko-KR" sz="1600" b="0" i="1" u="none" strike="noStrike" dirty="0">
+              <a:rPr lang="en-US" altLang="ko-KR" sz="1600" b="1" i="1" u="none" strike="noStrike" dirty="0">
                 <a:solidFill>
                   <a:srgbClr val="A0A1A7"/>
                 </a:solidFill>
@@ -20541,7 +20541,7 @@
               <a:t>// OnEvent </a:t>
             </a:r>
             <a:r>
-              <a:rPr lang="ko-KR" altLang="en-US" sz="1600" b="0" i="1" u="none" strike="noStrike" dirty="0">
+              <a:rPr lang="ko-KR" altLang="en-US" sz="1600" b="1" i="1" u="none" strike="noStrike" dirty="0">
                 <a:solidFill>
                   <a:srgbClr val="A0A1A7"/>
                 </a:solidFill>
@@ -20551,7 +20551,7 @@
               <a:t>타입으로 정의된 함수 포인터를 전달받음</a:t>
             </a:r>
             <a:br>
-              <a:rPr lang="ko-KR" altLang="en-US" sz="1600" b="0" i="0" u="none" strike="noStrike" dirty="0">
+              <a:rPr lang="ko-KR" altLang="en-US" sz="1600" b="1" i="0" u="none" strike="noStrike" dirty="0">
                 <a:solidFill>
                   <a:srgbClr val="383A42"/>
                 </a:solidFill>
@@ -20560,7 +20560,7 @@
               </a:rPr>
             </a:br>
             <a:r>
-              <a:rPr lang="en-US" altLang="ko-KR" sz="1600" b="0" i="0" u="none" strike="noStrike" dirty="0">
+              <a:rPr lang="en-US" altLang="ko-KR" sz="1600" b="1" i="0" u="none" strike="noStrike" dirty="0">
                 <a:solidFill>
                   <a:srgbClr val="A626A4"/>
                 </a:solidFill>
@@ -20570,7 +20570,7 @@
               <a:t>void</a:t>
             </a:r>
             <a:r>
-              <a:rPr lang="en-US" altLang="ko-KR" sz="1600" b="0" i="0" u="none" strike="noStrike" dirty="0">
+              <a:rPr lang="en-US" altLang="ko-KR" sz="1600" b="1" i="0" u="none" strike="noStrike" dirty="0">
                 <a:solidFill>
                   <a:srgbClr val="383A42"/>
                 </a:solidFill>
@@ -20580,7 +20580,7 @@
               <a:t> </a:t>
             </a:r>
             <a:r>
-              <a:rPr lang="en-US" altLang="ko-KR" sz="1600" b="0" i="0" u="none" strike="noStrike" dirty="0">
+              <a:rPr lang="en-US" altLang="ko-KR" sz="1600" b="1" i="0" u="none" strike="noStrike" dirty="0">
                 <a:solidFill>
                   <a:srgbClr val="4078F2"/>
                 </a:solidFill>
@@ -20590,7 +20590,7 @@
               <a:t>RegisterCallback</a:t>
             </a:r>
             <a:r>
-              <a:rPr lang="en-US" altLang="ko-KR" sz="1600" b="0" i="0" u="none" strike="noStrike" dirty="0">
+              <a:rPr lang="en-US" altLang="ko-KR" sz="1600" b="1" i="0" u="none" strike="noStrike" dirty="0">
                 <a:solidFill>
                   <a:srgbClr val="383A42"/>
                 </a:solidFill>
@@ -20599,7 +20599,7 @@
               </a:rPr>
               <a:t>(OnEvent callback);</a:t>
             </a:r>
-            <a:endParaRPr lang="ko-KR" altLang="en-US" sz="1600" dirty="0"/>
+            <a:endParaRPr lang="ko-KR" altLang="en-US" sz="1600" b="1" dirty="0"/>
           </a:p>
         </p:txBody>
       </p:sp>
@@ -20640,7 +20640,7 @@
           <a:lstStyle/>
           <a:p>
             <a:r>
-              <a:rPr lang="en-US" altLang="ko-KR" sz="1600" b="0" i="0" u="none" strike="noStrike" dirty="0">
+              <a:rPr lang="en-US" altLang="ko-KR" sz="1600" b="1" i="0" u="none" strike="noStrike" dirty="0">
                 <a:solidFill>
                   <a:srgbClr val="A626A4"/>
                 </a:solidFill>
@@ -20650,7 +20650,7 @@
               <a:t>typedef</a:t>
             </a:r>
             <a:r>
-              <a:rPr lang="en-US" altLang="ko-KR" sz="1600" b="0" i="0" u="none" strike="noStrike" dirty="0">
+              <a:rPr lang="en-US" altLang="ko-KR" sz="1600" b="1" i="0" u="none" strike="noStrike" dirty="0">
                 <a:solidFill>
                   <a:srgbClr val="383A42"/>
                 </a:solidFill>
@@ -20660,7 +20660,7 @@
               <a:t> </a:t>
             </a:r>
             <a:r>
-              <a:rPr lang="en-US" altLang="ko-KR" sz="1600" b="0" i="0" u="none" strike="noStrike" dirty="0">
+              <a:rPr lang="en-US" altLang="ko-KR" sz="1600" b="1" i="0" u="none" strike="noStrike" dirty="0">
                 <a:solidFill>
                   <a:srgbClr val="4078F2"/>
                 </a:solidFill>
@@ -20670,7 +20670,7 @@
               <a:t>int</a:t>
             </a:r>
             <a:r>
-              <a:rPr lang="en-US" altLang="ko-KR" sz="1600" b="0" i="0" u="none" strike="noStrike" dirty="0">
+              <a:rPr lang="en-US" altLang="ko-KR" sz="1600" b="1" i="0" u="none" strike="noStrike" dirty="0">
                 <a:solidFill>
                   <a:srgbClr val="383A42"/>
                 </a:solidFill>
@@ -20680,7 +20680,7 @@
               <a:t> (*BinaryOp)(</a:t>
             </a:r>
             <a:r>
-              <a:rPr lang="en-US" altLang="ko-KR" sz="1600" b="0" i="0" u="none" strike="noStrike" dirty="0">
+              <a:rPr lang="en-US" altLang="ko-KR" sz="1600" b="1" i="0" u="none" strike="noStrike" dirty="0">
                 <a:solidFill>
                   <a:srgbClr val="A626A4"/>
                 </a:solidFill>
@@ -20690,7 +20690,7 @@
               <a:t>int</a:t>
             </a:r>
             <a:r>
-              <a:rPr lang="en-US" altLang="ko-KR" sz="1600" b="0" i="0" u="none" strike="noStrike" dirty="0">
+              <a:rPr lang="en-US" altLang="ko-KR" sz="1600" b="1" i="0" u="none" strike="noStrike" dirty="0">
                 <a:solidFill>
                   <a:srgbClr val="383A42"/>
                 </a:solidFill>
@@ -20700,7 +20700,7 @@
               <a:t>, </a:t>
             </a:r>
             <a:r>
-              <a:rPr lang="en-US" altLang="ko-KR" sz="1600" b="0" i="0" u="none" strike="noStrike" dirty="0">
+              <a:rPr lang="en-US" altLang="ko-KR" sz="1600" b="1" i="0" u="none" strike="noStrike" dirty="0">
                 <a:solidFill>
                   <a:srgbClr val="A626A4"/>
                 </a:solidFill>
@@ -20710,7 +20710,7 @@
               <a:t>int</a:t>
             </a:r>
             <a:r>
-              <a:rPr lang="en-US" altLang="ko-KR" sz="1600" b="0" i="0" u="none" strike="noStrike" dirty="0">
+              <a:rPr lang="en-US" altLang="ko-KR" sz="1600" b="1" i="0" u="none" strike="noStrike" dirty="0">
                 <a:solidFill>
                   <a:srgbClr val="383A42"/>
                 </a:solidFill>
@@ -20720,7 +20720,7 @@
               <a:t>);</a:t>
             </a:r>
             <a:br>
-              <a:rPr lang="en-US" altLang="ko-KR" sz="1600" b="0" i="0" u="none" strike="noStrike" dirty="0">
+              <a:rPr lang="en-US" altLang="ko-KR" sz="1600" b="1" i="0" u="none" strike="noStrike" dirty="0">
                 <a:solidFill>
                   <a:srgbClr val="383A42"/>
                 </a:solidFill>
@@ -20729,7 +20729,7 @@
               </a:rPr>
             </a:br>
             <a:r>
-              <a:rPr lang="en-US" altLang="ko-KR" sz="1600" b="0" i="0" u="none" strike="noStrike" dirty="0">
+              <a:rPr lang="en-US" altLang="ko-KR" sz="1600" b="1" i="0" u="none" strike="noStrike" dirty="0">
                 <a:solidFill>
                   <a:srgbClr val="A626A4"/>
                 </a:solidFill>
@@ -20739,7 +20739,7 @@
               <a:t>int</a:t>
             </a:r>
             <a:r>
-              <a:rPr lang="en-US" altLang="ko-KR" sz="1600" b="0" i="0" u="none" strike="noStrike" dirty="0">
+              <a:rPr lang="en-US" altLang="ko-KR" sz="1600" b="1" i="0" u="none" strike="noStrike" dirty="0">
                 <a:solidFill>
                   <a:srgbClr val="383A42"/>
                 </a:solidFill>
@@ -20749,7 +20749,7 @@
               <a:t> </a:t>
             </a:r>
             <a:r>
-              <a:rPr lang="en-US" altLang="ko-KR" sz="1600" b="0" i="0" u="none" strike="noStrike" dirty="0">
+              <a:rPr lang="en-US" altLang="ko-KR" sz="1600" b="1" i="0" u="none" strike="noStrike" dirty="0">
                 <a:solidFill>
                   <a:srgbClr val="4078F2"/>
                 </a:solidFill>
@@ -20759,7 +20759,7 @@
               <a:t>Add</a:t>
             </a:r>
             <a:r>
-              <a:rPr lang="en-US" altLang="ko-KR" sz="1600" b="0" i="0" u="none" strike="noStrike" dirty="0">
+              <a:rPr lang="en-US" altLang="ko-KR" sz="1600" b="1" i="0" u="none" strike="noStrike" dirty="0">
                 <a:solidFill>
                   <a:srgbClr val="383A42"/>
                 </a:solidFill>
@@ -20769,7 +20769,7 @@
               <a:t>(</a:t>
             </a:r>
             <a:r>
-              <a:rPr lang="en-US" altLang="ko-KR" sz="1600" b="0" i="0" u="none" strike="noStrike" dirty="0">
+              <a:rPr lang="en-US" altLang="ko-KR" sz="1600" b="1" i="0" u="none" strike="noStrike" dirty="0">
                 <a:solidFill>
                   <a:srgbClr val="A626A4"/>
                 </a:solidFill>
@@ -20779,7 +20779,7 @@
               <a:t>int</a:t>
             </a:r>
             <a:r>
-              <a:rPr lang="en-US" altLang="ko-KR" sz="1600" b="0" i="0" u="none" strike="noStrike" dirty="0">
+              <a:rPr lang="en-US" altLang="ko-KR" sz="1600" b="1" i="0" u="none" strike="noStrike" dirty="0">
                 <a:solidFill>
                   <a:srgbClr val="383A42"/>
                 </a:solidFill>
@@ -20789,7 +20789,7 @@
               <a:t> a, </a:t>
             </a:r>
             <a:r>
-              <a:rPr lang="en-US" altLang="ko-KR" sz="1600" b="0" i="0" u="none" strike="noStrike" dirty="0">
+              <a:rPr lang="en-US" altLang="ko-KR" sz="1600" b="1" i="0" u="none" strike="noStrike" dirty="0">
                 <a:solidFill>
                   <a:srgbClr val="A626A4"/>
                 </a:solidFill>
@@ -20799,7 +20799,7 @@
               <a:t>int</a:t>
             </a:r>
             <a:r>
-              <a:rPr lang="en-US" altLang="ko-KR" sz="1600" b="0" i="0" u="none" strike="noStrike" dirty="0">
+              <a:rPr lang="en-US" altLang="ko-KR" sz="1600" b="1" i="0" u="none" strike="noStrike" dirty="0">
                 <a:solidFill>
                   <a:srgbClr val="383A42"/>
                 </a:solidFill>
@@ -20809,7 +20809,7 @@
               <a:t> b) { </a:t>
             </a:r>
             <a:r>
-              <a:rPr lang="en-US" altLang="ko-KR" sz="1600" b="0" i="0" u="none" strike="noStrike" dirty="0">
+              <a:rPr lang="en-US" altLang="ko-KR" sz="1600" b="1" i="0" u="none" strike="noStrike" dirty="0">
                 <a:solidFill>
                   <a:srgbClr val="A626A4"/>
                 </a:solidFill>
@@ -20819,7 +20819,7 @@
               <a:t>return</a:t>
             </a:r>
             <a:r>
-              <a:rPr lang="en-US" altLang="ko-KR" sz="1600" b="0" i="0" u="none" strike="noStrike" dirty="0">
+              <a:rPr lang="en-US" altLang="ko-KR" sz="1600" b="1" i="0" u="none" strike="noStrike" dirty="0">
                 <a:solidFill>
                   <a:srgbClr val="383A42"/>
                 </a:solidFill>
@@ -20829,7 +20829,7 @@
               <a:t> a + b; }</a:t>
             </a:r>
             <a:br>
-              <a:rPr lang="en-US" altLang="ko-KR" sz="1600" b="0" i="0" u="none" strike="noStrike" dirty="0">
+              <a:rPr lang="en-US" altLang="ko-KR" sz="1600" b="1" i="0" u="none" strike="noStrike" dirty="0">
                 <a:solidFill>
                   <a:srgbClr val="383A42"/>
                 </a:solidFill>
@@ -20838,7 +20838,7 @@
               </a:rPr>
             </a:br>
             <a:r>
-              <a:rPr lang="en-US" altLang="ko-KR" sz="1600" b="0" i="0" u="none" strike="noStrike" dirty="0">
+              <a:rPr lang="en-US" altLang="ko-KR" sz="1600" b="1" i="0" u="none" strike="noStrike" dirty="0">
                 <a:solidFill>
                   <a:srgbClr val="A626A4"/>
                 </a:solidFill>
@@ -20848,7 +20848,7 @@
               <a:t>int</a:t>
             </a:r>
             <a:r>
-              <a:rPr lang="en-US" altLang="ko-KR" sz="1600" b="0" i="0" u="none" strike="noStrike" dirty="0">
+              <a:rPr lang="en-US" altLang="ko-KR" sz="1600" b="1" i="0" u="none" strike="noStrike" dirty="0">
                 <a:solidFill>
                   <a:srgbClr val="383A42"/>
                 </a:solidFill>
@@ -20858,7 +20858,7 @@
               <a:t> </a:t>
             </a:r>
             <a:r>
-              <a:rPr lang="en-US" altLang="ko-KR" sz="1600" b="0" i="0" u="none" strike="noStrike" dirty="0">
+              <a:rPr lang="en-US" altLang="ko-KR" sz="1600" b="1" i="0" u="none" strike="noStrike" dirty="0">
                 <a:solidFill>
                   <a:srgbClr val="4078F2"/>
                 </a:solidFill>
@@ -20868,7 +20868,7 @@
               <a:t>Sub</a:t>
             </a:r>
             <a:r>
-              <a:rPr lang="en-US" altLang="ko-KR" sz="1600" b="0" i="0" u="none" strike="noStrike" dirty="0">
+              <a:rPr lang="en-US" altLang="ko-KR" sz="1600" b="1" i="0" u="none" strike="noStrike" dirty="0">
                 <a:solidFill>
                   <a:srgbClr val="383A42"/>
                 </a:solidFill>
@@ -20878,7 +20878,7 @@
               <a:t>(</a:t>
             </a:r>
             <a:r>
-              <a:rPr lang="en-US" altLang="ko-KR" sz="1600" b="0" i="0" u="none" strike="noStrike" dirty="0">
+              <a:rPr lang="en-US" altLang="ko-KR" sz="1600" b="1" i="0" u="none" strike="noStrike" dirty="0">
                 <a:solidFill>
                   <a:srgbClr val="A626A4"/>
                 </a:solidFill>
@@ -20888,7 +20888,7 @@
               <a:t>int</a:t>
             </a:r>
             <a:r>
-              <a:rPr lang="en-US" altLang="ko-KR" sz="1600" b="0" i="0" u="none" strike="noStrike" dirty="0">
+              <a:rPr lang="en-US" altLang="ko-KR" sz="1600" b="1" i="0" u="none" strike="noStrike" dirty="0">
                 <a:solidFill>
                   <a:srgbClr val="383A42"/>
                 </a:solidFill>
@@ -20898,7 +20898,7 @@
               <a:t> a, </a:t>
             </a:r>
             <a:r>
-              <a:rPr lang="en-US" altLang="ko-KR" sz="1600" b="0" i="0" u="none" strike="noStrike" dirty="0">
+              <a:rPr lang="en-US" altLang="ko-KR" sz="1600" b="1" i="0" u="none" strike="noStrike" dirty="0">
                 <a:solidFill>
                   <a:srgbClr val="A626A4"/>
                 </a:solidFill>
@@ -20908,7 +20908,7 @@
               <a:t>int</a:t>
             </a:r>
             <a:r>
-              <a:rPr lang="en-US" altLang="ko-KR" sz="1600" b="0" i="0" u="none" strike="noStrike" dirty="0">
+              <a:rPr lang="en-US" altLang="ko-KR" sz="1600" b="1" i="0" u="none" strike="noStrike" dirty="0">
                 <a:solidFill>
                   <a:srgbClr val="383A42"/>
                 </a:solidFill>
@@ -20918,7 +20918,7 @@
               <a:t> b) { </a:t>
             </a:r>
             <a:r>
-              <a:rPr lang="en-US" altLang="ko-KR" sz="1600" b="0" i="0" u="none" strike="noStrike" dirty="0">
+              <a:rPr lang="en-US" altLang="ko-KR" sz="1600" b="1" i="0" u="none" strike="noStrike" dirty="0">
                 <a:solidFill>
                   <a:srgbClr val="A626A4"/>
                 </a:solidFill>
@@ -20928,7 +20928,7 @@
               <a:t>return</a:t>
             </a:r>
             <a:r>
-              <a:rPr lang="en-US" altLang="ko-KR" sz="1600" b="0" i="0" u="none" strike="noStrike" dirty="0">
+              <a:rPr lang="en-US" altLang="ko-KR" sz="1600" b="1" i="0" u="none" strike="noStrike" dirty="0">
                 <a:solidFill>
                   <a:srgbClr val="383A42"/>
                 </a:solidFill>
@@ -20938,7 +20938,7 @@
               <a:t> a - b; }</a:t>
             </a:r>
             <a:br>
-              <a:rPr lang="en-US" altLang="ko-KR" sz="1600" b="0" i="0" u="none" strike="noStrike" dirty="0">
+              <a:rPr lang="en-US" altLang="ko-KR" sz="1600" b="1" i="0" u="none" strike="noStrike" dirty="0">
                 <a:solidFill>
                   <a:srgbClr val="383A42"/>
                 </a:solidFill>
@@ -20947,7 +20947,7 @@
               </a:rPr>
             </a:br>
             <a:br>
-              <a:rPr lang="en-US" altLang="ko-KR" sz="1600" b="0" i="0" u="none" strike="noStrike" dirty="0">
+              <a:rPr lang="en-US" altLang="ko-KR" sz="1600" b="1" i="0" u="none" strike="noStrike" dirty="0">
                 <a:solidFill>
                   <a:srgbClr val="383A42"/>
                 </a:solidFill>
@@ -20956,7 +20956,7 @@
               </a:rPr>
             </a:br>
             <a:r>
-              <a:rPr lang="en-US" altLang="ko-KR" sz="1600" b="0" i="0" u="none" strike="noStrike" dirty="0">
+              <a:rPr lang="en-US" altLang="ko-KR" sz="1600" b="1" i="0" u="none" strike="noStrike" dirty="0">
                 <a:solidFill>
                   <a:srgbClr val="A626A4"/>
                 </a:solidFill>
@@ -20966,7 +20966,7 @@
               <a:t>int</a:t>
             </a:r>
             <a:r>
-              <a:rPr lang="en-US" altLang="ko-KR" sz="1600" b="0" i="0" u="none" strike="noStrike" dirty="0">
+              <a:rPr lang="en-US" altLang="ko-KR" sz="1600" b="1" i="0" u="none" strike="noStrike" dirty="0">
                 <a:solidFill>
                   <a:srgbClr val="383A42"/>
                 </a:solidFill>
@@ -20976,7 +20976,7 @@
               <a:t> </a:t>
             </a:r>
             <a:r>
-              <a:rPr lang="en-US" altLang="ko-KR" sz="1600" b="0" i="0" u="none" strike="noStrike" dirty="0">
+              <a:rPr lang="en-US" altLang="ko-KR" sz="1600" b="1" i="0" u="none" strike="noStrike" dirty="0">
                 <a:solidFill>
                   <a:srgbClr val="4078F2"/>
                 </a:solidFill>
@@ -20986,7 +20986,7 @@
               <a:t>main</a:t>
             </a:r>
             <a:r>
-              <a:rPr lang="en-US" altLang="ko-KR" sz="1600" b="0" i="0" u="none" strike="noStrike" dirty="0">
+              <a:rPr lang="en-US" altLang="ko-KR" sz="1600" b="1" i="0" u="none" strike="noStrike" dirty="0">
                 <a:solidFill>
                   <a:srgbClr val="383A42"/>
                 </a:solidFill>
@@ -20996,7 +20996,7 @@
               <a:t>(</a:t>
             </a:r>
             <a:r>
-              <a:rPr lang="en-US" altLang="ko-KR" sz="1600" b="0" i="0" u="none" strike="noStrike" dirty="0">
+              <a:rPr lang="en-US" altLang="ko-KR" sz="1600" b="1" i="0" u="none" strike="noStrike" dirty="0">
                 <a:solidFill>
                   <a:srgbClr val="A626A4"/>
                 </a:solidFill>
@@ -21006,7 +21006,7 @@
               <a:t>void</a:t>
             </a:r>
             <a:r>
-              <a:rPr lang="en-US" altLang="ko-KR" sz="1600" b="0" i="0" u="none" strike="noStrike" dirty="0">
+              <a:rPr lang="en-US" altLang="ko-KR" sz="1600" b="1" i="0" u="none" strike="noStrike" dirty="0">
                 <a:solidFill>
                   <a:srgbClr val="383A42"/>
                 </a:solidFill>
@@ -21016,7 +21016,7 @@
               <a:t>) {</a:t>
             </a:r>
             <a:br>
-              <a:rPr lang="en-US" altLang="ko-KR" sz="1600" b="0" i="0" u="none" strike="noStrike" dirty="0">
+              <a:rPr lang="en-US" altLang="ko-KR" sz="1600" b="1" i="0" u="none" strike="noStrike" dirty="0">
                 <a:solidFill>
                   <a:srgbClr val="383A42"/>
                 </a:solidFill>
@@ -21025,7 +21025,7 @@
               </a:rPr>
             </a:br>
             <a:r>
-              <a:rPr lang="en-US" altLang="ko-KR" sz="1600" b="0" i="0" u="none" strike="noStrike" dirty="0">
+              <a:rPr lang="en-US" altLang="ko-KR" sz="1600" b="1" i="0" u="none" strike="noStrike" dirty="0">
                 <a:solidFill>
                   <a:srgbClr val="383A42"/>
                 </a:solidFill>
@@ -21035,7 +21035,7 @@
               <a:t>    BinaryOp op = Add;           </a:t>
             </a:r>
             <a:r>
-              <a:rPr lang="en-US" altLang="ko-KR" sz="1600" b="0" i="1" u="none" strike="noStrike" dirty="0">
+              <a:rPr lang="en-US" altLang="ko-KR" sz="1600" b="1" i="1" u="none" strike="noStrike" dirty="0">
                 <a:solidFill>
                   <a:srgbClr val="A0A1A7"/>
                 </a:solidFill>
@@ -21045,7 +21045,7 @@
               <a:t>// </a:t>
             </a:r>
             <a:r>
-              <a:rPr lang="ko-KR" altLang="en-US" sz="1600" b="0" i="1" u="none" strike="noStrike" dirty="0">
+              <a:rPr lang="ko-KR" altLang="en-US" sz="1600" b="1" i="1" u="none" strike="noStrike" dirty="0">
                 <a:solidFill>
                   <a:srgbClr val="A0A1A7"/>
                 </a:solidFill>
@@ -21055,7 +21055,7 @@
               <a:t>함수 포인터에 함수 대입</a:t>
             </a:r>
             <a:br>
-              <a:rPr lang="ko-KR" altLang="en-US" sz="1600" b="0" i="0" u="none" strike="noStrike" dirty="0">
+              <a:rPr lang="ko-KR" altLang="en-US" sz="1600" b="1" i="0" u="none" strike="noStrike" dirty="0">
                 <a:solidFill>
                   <a:srgbClr val="383A42"/>
                 </a:solidFill>
@@ -21064,7 +21064,7 @@
               </a:rPr>
             </a:br>
             <a:r>
-              <a:rPr lang="ko-KR" altLang="en-US" sz="1600" b="0" i="0" u="none" strike="noStrike" dirty="0">
+              <a:rPr lang="ko-KR" altLang="en-US" sz="1600" b="1" i="0" u="none" strike="noStrike" dirty="0">
                 <a:solidFill>
                   <a:srgbClr val="383A42"/>
                 </a:solidFill>
@@ -21074,7 +21074,7 @@
               <a:t>    </a:t>
             </a:r>
             <a:r>
-              <a:rPr lang="en-US" altLang="ko-KR" sz="1600" b="0" i="0" u="none" strike="noStrike" dirty="0">
+              <a:rPr lang="en-US" altLang="ko-KR" sz="1600" b="1" i="0" u="none" strike="noStrike" dirty="0">
                 <a:solidFill>
                   <a:srgbClr val="C18401"/>
                 </a:solidFill>
@@ -21084,7 +21084,7 @@
               <a:t>printf</a:t>
             </a:r>
             <a:r>
-              <a:rPr lang="en-US" altLang="ko-KR" sz="1600" b="0" i="0" u="none" strike="noStrike" dirty="0">
+              <a:rPr lang="en-US" altLang="ko-KR" sz="1600" b="1" i="0" u="none" strike="noStrike" dirty="0">
                 <a:solidFill>
                   <a:srgbClr val="383A42"/>
                 </a:solidFill>
@@ -21094,7 +21094,7 @@
               <a:t>(</a:t>
             </a:r>
             <a:r>
-              <a:rPr lang="en-US" altLang="ko-KR" sz="1600" b="0" i="0" u="none" strike="noStrike" dirty="0">
+              <a:rPr lang="en-US" altLang="ko-KR" sz="1600" b="1" i="0" u="none" strike="noStrike" dirty="0">
                 <a:solidFill>
                   <a:srgbClr val="50A14F"/>
                 </a:solidFill>
@@ -21104,7 +21104,7 @@
               <a:t>"%d\n"</a:t>
             </a:r>
             <a:r>
-              <a:rPr lang="en-US" altLang="ko-KR" sz="1600" b="0" i="0" u="none" strike="noStrike" dirty="0">
+              <a:rPr lang="en-US" altLang="ko-KR" sz="1600" b="1" i="0" u="none" strike="noStrike" dirty="0">
                 <a:solidFill>
                   <a:srgbClr val="383A42"/>
                 </a:solidFill>
@@ -21114,7 +21114,7 @@
               <a:t>, op(</a:t>
             </a:r>
             <a:r>
-              <a:rPr lang="en-US" altLang="ko-KR" sz="1600" b="0" i="0" u="none" strike="noStrike" dirty="0">
+              <a:rPr lang="en-US" altLang="ko-KR" sz="1600" b="1" i="0" u="none" strike="noStrike" dirty="0">
                 <a:solidFill>
                   <a:srgbClr val="986801"/>
                 </a:solidFill>
@@ -21124,7 +21124,7 @@
               <a:t>10</a:t>
             </a:r>
             <a:r>
-              <a:rPr lang="en-US" altLang="ko-KR" sz="1600" b="0" i="0" u="none" strike="noStrike" dirty="0">
+              <a:rPr lang="en-US" altLang="ko-KR" sz="1600" b="1" i="0" u="none" strike="noStrike" dirty="0">
                 <a:solidFill>
                   <a:srgbClr val="383A42"/>
                 </a:solidFill>
@@ -21134,7 +21134,7 @@
               <a:t>, </a:t>
             </a:r>
             <a:r>
-              <a:rPr lang="en-US" altLang="ko-KR" sz="1600" b="0" i="0" u="none" strike="noStrike" dirty="0">
+              <a:rPr lang="en-US" altLang="ko-KR" sz="1600" b="1" i="0" u="none" strike="noStrike" dirty="0">
                 <a:solidFill>
                   <a:srgbClr val="986801"/>
                 </a:solidFill>
@@ -21144,7 +21144,7 @@
               <a:t>20</a:t>
             </a:r>
             <a:r>
-              <a:rPr lang="en-US" altLang="ko-KR" sz="1600" b="0" i="0" u="none" strike="noStrike" dirty="0">
+              <a:rPr lang="en-US" altLang="ko-KR" sz="1600" b="1" i="0" u="none" strike="noStrike" dirty="0">
                 <a:solidFill>
                   <a:srgbClr val="383A42"/>
                 </a:solidFill>
@@ -21154,7 +21154,7 @@
               <a:t>));  </a:t>
             </a:r>
             <a:r>
-              <a:rPr lang="en-US" altLang="ko-KR" sz="1600" b="0" i="1" u="none" strike="noStrike" dirty="0">
+              <a:rPr lang="en-US" altLang="ko-KR" sz="1600" b="1" i="1" u="none" strike="noStrike" dirty="0">
                 <a:solidFill>
                   <a:srgbClr val="A0A1A7"/>
                 </a:solidFill>
@@ -21164,7 +21164,7 @@
               <a:t>// Add </a:t>
             </a:r>
             <a:r>
-              <a:rPr lang="ko-KR" altLang="en-US" sz="1600" b="0" i="1" u="none" strike="noStrike" dirty="0">
+              <a:rPr lang="ko-KR" altLang="en-US" sz="1600" b="1" i="1" u="none" strike="noStrike" dirty="0">
                 <a:solidFill>
                   <a:srgbClr val="A0A1A7"/>
                 </a:solidFill>
@@ -21174,7 +21174,7 @@
               <a:t>호출</a:t>
             </a:r>
             <a:br>
-              <a:rPr lang="ko-KR" altLang="en-US" sz="1600" b="0" i="0" u="none" strike="noStrike" dirty="0">
+              <a:rPr lang="ko-KR" altLang="en-US" sz="1600" b="1" i="0" u="none" strike="noStrike" dirty="0">
                 <a:solidFill>
                   <a:srgbClr val="383A42"/>
                 </a:solidFill>
@@ -21183,7 +21183,7 @@
               </a:rPr>
             </a:br>
             <a:r>
-              <a:rPr lang="ko-KR" altLang="en-US" sz="1600" b="0" i="0" u="none" strike="noStrike" dirty="0">
+              <a:rPr lang="ko-KR" altLang="en-US" sz="1600" b="1" i="0" u="none" strike="noStrike" dirty="0">
                 <a:solidFill>
                   <a:srgbClr val="383A42"/>
                 </a:solidFill>
@@ -21193,7 +21193,7 @@
               <a:t>    </a:t>
             </a:r>
             <a:r>
-              <a:rPr lang="en-US" altLang="ko-KR" sz="1600" b="0" i="0" u="none" strike="noStrike" dirty="0">
+              <a:rPr lang="en-US" altLang="ko-KR" sz="1600" b="1" i="0" u="none" strike="noStrike" dirty="0">
                 <a:solidFill>
                   <a:srgbClr val="383A42"/>
                 </a:solidFill>
@@ -21203,7 +21203,7 @@
               <a:t>op = Sub;</a:t>
             </a:r>
             <a:br>
-              <a:rPr lang="en-US" altLang="ko-KR" sz="1600" b="0" i="0" u="none" strike="noStrike" dirty="0">
+              <a:rPr lang="en-US" altLang="ko-KR" sz="1600" b="1" i="0" u="none" strike="noStrike" dirty="0">
                 <a:solidFill>
                   <a:srgbClr val="383A42"/>
                 </a:solidFill>
@@ -21212,7 +21212,7 @@
               </a:rPr>
             </a:br>
             <a:r>
-              <a:rPr lang="en-US" altLang="ko-KR" sz="1600" b="0" i="0" u="none" strike="noStrike" dirty="0">
+              <a:rPr lang="en-US" altLang="ko-KR" sz="1600" b="1" i="0" u="none" strike="noStrike" dirty="0">
                 <a:solidFill>
                   <a:srgbClr val="383A42"/>
                 </a:solidFill>
@@ -21222,7 +21222,7 @@
               <a:t>    </a:t>
             </a:r>
             <a:r>
-              <a:rPr lang="en-US" altLang="ko-KR" sz="1600" b="0" i="0" u="none" strike="noStrike" dirty="0">
+              <a:rPr lang="en-US" altLang="ko-KR" sz="1600" b="1" i="0" u="none" strike="noStrike" dirty="0">
                 <a:solidFill>
                   <a:srgbClr val="C18401"/>
                 </a:solidFill>
@@ -21232,7 +21232,7 @@
               <a:t>printf</a:t>
             </a:r>
             <a:r>
-              <a:rPr lang="en-US" altLang="ko-KR" sz="1600" b="0" i="0" u="none" strike="noStrike" dirty="0">
+              <a:rPr lang="en-US" altLang="ko-KR" sz="1600" b="1" i="0" u="none" strike="noStrike" dirty="0">
                 <a:solidFill>
                   <a:srgbClr val="383A42"/>
                 </a:solidFill>
@@ -21242,7 +21242,7 @@
               <a:t>(</a:t>
             </a:r>
             <a:r>
-              <a:rPr lang="en-US" altLang="ko-KR" sz="1600" b="0" i="0" u="none" strike="noStrike" dirty="0">
+              <a:rPr lang="en-US" altLang="ko-KR" sz="1600" b="1" i="0" u="none" strike="noStrike" dirty="0">
                 <a:solidFill>
                   <a:srgbClr val="50A14F"/>
                 </a:solidFill>
@@ -21252,7 +21252,7 @@
               <a:t>"%d\n"</a:t>
             </a:r>
             <a:r>
-              <a:rPr lang="en-US" altLang="ko-KR" sz="1600" b="0" i="0" u="none" strike="noStrike" dirty="0">
+              <a:rPr lang="en-US" altLang="ko-KR" sz="1600" b="1" i="0" u="none" strike="noStrike" dirty="0">
                 <a:solidFill>
                   <a:srgbClr val="383A42"/>
                 </a:solidFill>
@@ -21262,7 +21262,7 @@
               <a:t>, op(</a:t>
             </a:r>
             <a:r>
-              <a:rPr lang="en-US" altLang="ko-KR" sz="1600" b="0" i="0" u="none" strike="noStrike" dirty="0">
+              <a:rPr lang="en-US" altLang="ko-KR" sz="1600" b="1" i="0" u="none" strike="noStrike" dirty="0">
                 <a:solidFill>
                   <a:srgbClr val="986801"/>
                 </a:solidFill>
@@ -21272,7 +21272,7 @@
               <a:t>10</a:t>
             </a:r>
             <a:r>
-              <a:rPr lang="en-US" altLang="ko-KR" sz="1600" b="0" i="0" u="none" strike="noStrike" dirty="0">
+              <a:rPr lang="en-US" altLang="ko-KR" sz="1600" b="1" i="0" u="none" strike="noStrike" dirty="0">
                 <a:solidFill>
                   <a:srgbClr val="383A42"/>
                 </a:solidFill>
@@ -21282,7 +21282,7 @@
               <a:t>, </a:t>
             </a:r>
             <a:r>
-              <a:rPr lang="en-US" altLang="ko-KR" sz="1600" b="0" i="0" u="none" strike="noStrike" dirty="0">
+              <a:rPr lang="en-US" altLang="ko-KR" sz="1600" b="1" i="0" u="none" strike="noStrike" dirty="0">
                 <a:solidFill>
                   <a:srgbClr val="986801"/>
                 </a:solidFill>
@@ -21292,7 +21292,7 @@
               <a:t>20</a:t>
             </a:r>
             <a:r>
-              <a:rPr lang="en-US" altLang="ko-KR" sz="1600" b="0" i="0" u="none" strike="noStrike" dirty="0">
+              <a:rPr lang="en-US" altLang="ko-KR" sz="1600" b="1" i="0" u="none" strike="noStrike" dirty="0">
                 <a:solidFill>
                   <a:srgbClr val="383A42"/>
                 </a:solidFill>
@@ -21302,7 +21302,7 @@
               <a:t>));  </a:t>
             </a:r>
             <a:r>
-              <a:rPr lang="en-US" altLang="ko-KR" sz="1600" b="0" i="1" u="none" strike="noStrike" dirty="0">
+              <a:rPr lang="en-US" altLang="ko-KR" sz="1600" b="1" i="1" u="none" strike="noStrike" dirty="0">
                 <a:solidFill>
                   <a:srgbClr val="A0A1A7"/>
                 </a:solidFill>
@@ -21312,7 +21312,7 @@
               <a:t>// Sub </a:t>
             </a:r>
             <a:r>
-              <a:rPr lang="ko-KR" altLang="en-US" sz="1600" b="0" i="1" u="none" strike="noStrike" dirty="0">
+              <a:rPr lang="ko-KR" altLang="en-US" sz="1600" b="1" i="1" u="none" strike="noStrike" dirty="0">
                 <a:solidFill>
                   <a:srgbClr val="A0A1A7"/>
                 </a:solidFill>
@@ -21322,7 +21322,7 @@
               <a:t>호출</a:t>
             </a:r>
             <a:br>
-              <a:rPr lang="ko-KR" altLang="en-US" sz="1600" b="0" i="0" u="none" strike="noStrike" dirty="0">
+              <a:rPr lang="ko-KR" altLang="en-US" sz="1600" b="1" i="0" u="none" strike="noStrike" dirty="0">
                 <a:solidFill>
                   <a:srgbClr val="383A42"/>
                 </a:solidFill>
@@ -21331,7 +21331,7 @@
               </a:rPr>
             </a:br>
             <a:r>
-              <a:rPr lang="en-US" altLang="ko-KR" sz="1600" b="0" i="0" u="none" strike="noStrike" dirty="0">
+              <a:rPr lang="en-US" altLang="ko-KR" sz="1600" b="1" i="0" u="none" strike="noStrike" dirty="0">
                 <a:solidFill>
                   <a:srgbClr val="383A42"/>
                 </a:solidFill>
@@ -21340,7 +21340,7 @@
               </a:rPr>
               <a:t>}</a:t>
             </a:r>
-            <a:endParaRPr lang="ko-KR" altLang="en-US" sz="1600" dirty="0"/>
+            <a:endParaRPr lang="ko-KR" altLang="en-US" sz="1600" b="1" dirty="0"/>
           </a:p>
         </p:txBody>
       </p:sp>
